--- a/統計計算.pptx
+++ b/統計計算.pptx
@@ -30,8 +30,8 @@
     <p:sldId id="269" r:id="rId21"/>
     <p:sldId id="286" r:id="rId22"/>
     <p:sldId id="270" r:id="rId23"/>
-    <p:sldId id="287" r:id="rId24"/>
-    <p:sldId id="271" r:id="rId25"/>
+    <p:sldId id="289" r:id="rId24"/>
+    <p:sldId id="288" r:id="rId25"/>
     <p:sldId id="272" r:id="rId26"/>
     <p:sldId id="273" r:id="rId27"/>
   </p:sldIdLst>
@@ -222,7 +222,7 @@
           <a:p>
             <a:fld id="{84635FF2-8915-A54A-8EAD-8F85AB9A51FE}" type="datetimeFigureOut">
               <a:rPr kumimoji="1" lang="zh-TW" altLang="en-US" smtClean="0"/>
-              <a:t>2026/5/14</a:t>
+              <a:t>2026/5/15</a:t>
             </a:fld>
             <a:endParaRPr kumimoji="1" lang="zh-TW" altLang="en-US"/>
           </a:p>
@@ -1739,7 +1739,7 @@
         <p:cNvPr id="1" name="">
           <a:extLst>
             <a:ext uri="{FF2B5EF4-FFF2-40B4-BE49-F238E27FC236}">
-              <a16:creationId xmlns:a16="http://schemas.microsoft.com/office/drawing/2014/main" id="{B9512325-867B-1B1F-0A27-01C6A51BCF86}"/>
+              <a16:creationId xmlns:a16="http://schemas.microsoft.com/office/drawing/2014/main" id="{8E7A4D6E-BA77-90BA-9C92-F5DB6510FA68}"/>
             </a:ext>
           </a:extLst>
         </p:cNvPr>
@@ -1759,7 +1759,7 @@
           <p:cNvPr id="2" name="投影片影像版面配置區 1">
             <a:extLst>
               <a:ext uri="{FF2B5EF4-FFF2-40B4-BE49-F238E27FC236}">
-                <a16:creationId xmlns:a16="http://schemas.microsoft.com/office/drawing/2014/main" id="{495527B0-F58B-649C-04C4-0A7767E24FD0}"/>
+                <a16:creationId xmlns:a16="http://schemas.microsoft.com/office/drawing/2014/main" id="{CC3430F0-D7BE-CD14-00C9-D074673EDBD4}"/>
               </a:ext>
             </a:extLst>
           </p:cNvPr>
@@ -1777,7 +1777,7 @@
           <p:cNvPr id="3" name="備忘稿版面配置區 2">
             <a:extLst>
               <a:ext uri="{FF2B5EF4-FFF2-40B4-BE49-F238E27FC236}">
-                <a16:creationId xmlns:a16="http://schemas.microsoft.com/office/drawing/2014/main" id="{D27FE10B-E615-6EA5-AC7B-4990F300828B}"/>
+                <a16:creationId xmlns:a16="http://schemas.microsoft.com/office/drawing/2014/main" id="{4ED56A10-A6F5-C3E6-6B95-6CE799B72F5A}"/>
               </a:ext>
             </a:extLst>
           </p:cNvPr>
@@ -1922,7 +1922,7 @@
           <p:cNvPr id="4" name="投影片編號版面配置區 3">
             <a:extLst>
               <a:ext uri="{FF2B5EF4-FFF2-40B4-BE49-F238E27FC236}">
-                <a16:creationId xmlns:a16="http://schemas.microsoft.com/office/drawing/2014/main" id="{D1824E00-1D34-F423-7A8F-5C67BF5D0808}"/>
+                <a16:creationId xmlns:a16="http://schemas.microsoft.com/office/drawing/2014/main" id="{2C515A83-5339-D42A-A9CE-53E27DE7A2B9}"/>
               </a:ext>
             </a:extLst>
           </p:cNvPr>
@@ -1949,7 +1949,235 @@
     </p:spTree>
     <p:extLst>
       <p:ext uri="{BB962C8B-B14F-4D97-AF65-F5344CB8AC3E}">
-        <p14:creationId xmlns:p14="http://schemas.microsoft.com/office/powerpoint/2010/main" val="3357247392"/>
+        <p14:creationId xmlns:p14="http://schemas.microsoft.com/office/powerpoint/2010/main" val="3592978255"/>
+      </p:ext>
+    </p:extLst>
+  </p:cSld>
+  <p:clrMapOvr>
+    <a:masterClrMapping/>
+  </p:clrMapOvr>
+</p:notes>
+</file>
+
+<file path=ppt/notesSlides/notesSlide8.xml><?xml version="1.0" encoding="utf-8"?>
+<p:notes xmlns:a="http://schemas.openxmlformats.org/drawingml/2006/main" xmlns:r="http://schemas.openxmlformats.org/officeDocument/2006/relationships" xmlns:p="http://schemas.openxmlformats.org/presentationml/2006/main">
+  <p:cSld>
+    <p:spTree>
+      <p:nvGrpSpPr>
+        <p:cNvPr id="1" name="">
+          <a:extLst>
+            <a:ext uri="{FF2B5EF4-FFF2-40B4-BE49-F238E27FC236}">
+              <a16:creationId xmlns:a16="http://schemas.microsoft.com/office/drawing/2014/main" id="{4B74FBCB-9131-BB02-1053-77CD1C29A3AB}"/>
+            </a:ext>
+          </a:extLst>
+        </p:cNvPr>
+        <p:cNvGrpSpPr/>
+        <p:nvPr/>
+      </p:nvGrpSpPr>
+      <p:grpSpPr>
+        <a:xfrm>
+          <a:off x="0" y="0"/>
+          <a:ext cx="0" cy="0"/>
+          <a:chOff x="0" y="0"/>
+          <a:chExt cx="0" cy="0"/>
+        </a:xfrm>
+      </p:grpSpPr>
+      <p:sp>
+        <p:nvSpPr>
+          <p:cNvPr id="2" name="投影片影像版面配置區 1">
+            <a:extLst>
+              <a:ext uri="{FF2B5EF4-FFF2-40B4-BE49-F238E27FC236}">
+                <a16:creationId xmlns:a16="http://schemas.microsoft.com/office/drawing/2014/main" id="{897FFBB0-FF18-7E6E-EADE-464406767E18}"/>
+              </a:ext>
+            </a:extLst>
+          </p:cNvPr>
+          <p:cNvSpPr>
+            <a:spLocks noGrp="1" noRot="1" noChangeAspect="1"/>
+          </p:cNvSpPr>
+          <p:nvPr>
+            <p:ph type="sldImg"/>
+          </p:nvPr>
+        </p:nvSpPr>
+        <p:spPr/>
+      </p:sp>
+      <p:sp>
+        <p:nvSpPr>
+          <p:cNvPr id="3" name="備忘稿版面配置區 2">
+            <a:extLst>
+              <a:ext uri="{FF2B5EF4-FFF2-40B4-BE49-F238E27FC236}">
+                <a16:creationId xmlns:a16="http://schemas.microsoft.com/office/drawing/2014/main" id="{7F8B58B7-3076-3D64-B0AE-E040BEE93CCD}"/>
+              </a:ext>
+            </a:extLst>
+          </p:cNvPr>
+          <p:cNvSpPr>
+            <a:spLocks noGrp="1"/>
+          </p:cNvSpPr>
+          <p:nvPr>
+            <p:ph type="body" idx="1"/>
+          </p:nvPr>
+        </p:nvSpPr>
+        <p:spPr/>
+        <p:txBody>
+          <a:bodyPr/>
+          <a:lstStyle/>
+          <a:p>
+            <a:pPr marL="742950" lvl="1" indent="-285750" algn="l">
+              <a:lnSpc>
+                <a:spcPct val="100000"/>
+              </a:lnSpc>
+              <a:buFont typeface="Arial" panose="020B0604020202020204" pitchFamily="34" charset="0"/>
+              <a:buChar char="•"/>
+            </a:pPr>
+            <a:r>
+              <a:rPr lang="en" altLang="zh-TW" sz="1600" dirty="0">
+                <a:solidFill>
+                  <a:schemeClr val="tx1">
+                    <a:lumMod val="75000"/>
+                    <a:lumOff val="25000"/>
+                  </a:schemeClr>
+                </a:solidFill>
+                <a:latin typeface="Cambria" panose="02040503050406030204" pitchFamily="18" charset="0"/>
+                <a:ea typeface="Songti SC" panose="02010600040101010101" pitchFamily="2" charset="-122"/>
+              </a:rPr>
+              <a:t>Monte Carlo Estimation Methods</a:t>
+            </a:r>
+          </a:p>
+          <a:p>
+            <a:pPr marL="742950" lvl="1" indent="-285750" algn="l">
+              <a:lnSpc>
+                <a:spcPct val="100000"/>
+              </a:lnSpc>
+              <a:buFont typeface="Arial" panose="020B0604020202020204" pitchFamily="34" charset="0"/>
+              <a:buChar char="•"/>
+            </a:pPr>
+            <a:r>
+              <a:rPr lang="en" altLang="zh-TW" sz="1600" dirty="0">
+                <a:solidFill>
+                  <a:schemeClr val="tx1">
+                    <a:lumMod val="75000"/>
+                    <a:lumOff val="25000"/>
+                  </a:schemeClr>
+                </a:solidFill>
+                <a:latin typeface="Cambria" panose="02040503050406030204" pitchFamily="18" charset="0"/>
+                <a:ea typeface="Songti SC" panose="02010600040101010101" pitchFamily="2" charset="-122"/>
+              </a:rPr>
+              <a:t>Bootstrap</a:t>
+            </a:r>
+          </a:p>
+          <a:p>
+            <a:pPr marL="742950" lvl="1" indent="-285750" algn="l">
+              <a:lnSpc>
+                <a:spcPct val="100000"/>
+              </a:lnSpc>
+              <a:buFont typeface="Arial" panose="020B0604020202020204" pitchFamily="34" charset="0"/>
+              <a:buChar char="•"/>
+            </a:pPr>
+            <a:r>
+              <a:rPr lang="zh-TW" altLang="zh-TW" sz="1600" dirty="0">
+                <a:solidFill>
+                  <a:schemeClr val="tx1">
+                    <a:lumMod val="75000"/>
+                    <a:lumOff val="25000"/>
+                  </a:schemeClr>
+                </a:solidFill>
+                <a:latin typeface="Cambria" panose="02040503050406030204" pitchFamily="18" charset="0"/>
+                <a:ea typeface="Songti SC" panose="02010600040101010101" pitchFamily="2" charset="-122"/>
+              </a:rPr>
+              <a:t>Jackknife Method</a:t>
+            </a:r>
+            <a:endParaRPr lang="en-US" altLang="zh-TW" sz="1600" dirty="0">
+              <a:solidFill>
+                <a:schemeClr val="tx1">
+                  <a:lumMod val="75000"/>
+                  <a:lumOff val="25000"/>
+                </a:schemeClr>
+              </a:solidFill>
+              <a:latin typeface="Cambria" panose="02040503050406030204" pitchFamily="18" charset="0"/>
+              <a:ea typeface="Songti SC" panose="02010600040101010101" pitchFamily="2" charset="-122"/>
+            </a:endParaRPr>
+          </a:p>
+          <a:p>
+            <a:pPr marL="742950" lvl="1" indent="-285750" algn="l">
+              <a:lnSpc>
+                <a:spcPct val="100000"/>
+              </a:lnSpc>
+              <a:buFont typeface="Arial" panose="020B0604020202020204" pitchFamily="34" charset="0"/>
+              <a:buChar char="•"/>
+            </a:pPr>
+            <a:r>
+              <a:rPr lang="en-US" altLang="zh-TW" sz="1600" dirty="0">
+                <a:solidFill>
+                  <a:schemeClr val="tx1">
+                    <a:lumMod val="75000"/>
+                    <a:lumOff val="25000"/>
+                  </a:schemeClr>
+                </a:solidFill>
+                <a:latin typeface="Cambria" panose="02040503050406030204" pitchFamily="18" charset="0"/>
+                <a:ea typeface="Songti SC" panose="02010600040101010101" pitchFamily="2" charset="-122"/>
+              </a:rPr>
+              <a:t>Permutation Test</a:t>
+            </a:r>
+          </a:p>
+          <a:p>
+            <a:pPr marL="742950" lvl="1" indent="-285750" algn="l">
+              <a:lnSpc>
+                <a:spcPct val="100000"/>
+              </a:lnSpc>
+              <a:buFont typeface="Arial" panose="020B0604020202020204" pitchFamily="34" charset="0"/>
+              <a:buChar char="•"/>
+            </a:pPr>
+            <a:r>
+              <a:rPr lang="en-US" altLang="zh-TW" sz="1600" dirty="0">
+                <a:solidFill>
+                  <a:schemeClr val="tx1">
+                    <a:lumMod val="75000"/>
+                    <a:lumOff val="25000"/>
+                  </a:schemeClr>
+                </a:solidFill>
+                <a:latin typeface="Cambria" panose="02040503050406030204" pitchFamily="18" charset="0"/>
+                <a:ea typeface="Songti SC" panose="02010600040101010101" pitchFamily="2" charset="-122"/>
+              </a:rPr>
+              <a:t>Markov Chain Monte Carlo (MCMC)-Metropolis Hastings Algorithm</a:t>
+            </a:r>
+          </a:p>
+          <a:p>
+            <a:endParaRPr kumimoji="1" lang="zh-TW" altLang="en-US" dirty="0"/>
+          </a:p>
+        </p:txBody>
+      </p:sp>
+      <p:sp>
+        <p:nvSpPr>
+          <p:cNvPr id="4" name="投影片編號版面配置區 3">
+            <a:extLst>
+              <a:ext uri="{FF2B5EF4-FFF2-40B4-BE49-F238E27FC236}">
+                <a16:creationId xmlns:a16="http://schemas.microsoft.com/office/drawing/2014/main" id="{37E3D68E-74D8-37FD-7CB3-B3A97A8B6E79}"/>
+              </a:ext>
+            </a:extLst>
+          </p:cNvPr>
+          <p:cNvSpPr>
+            <a:spLocks noGrp="1"/>
+          </p:cNvSpPr>
+          <p:nvPr>
+            <p:ph type="sldNum" sz="quarter" idx="5"/>
+          </p:nvPr>
+        </p:nvSpPr>
+        <p:spPr/>
+        <p:txBody>
+          <a:bodyPr/>
+          <a:lstStyle/>
+          <a:p>
+            <a:fld id="{4AE3F3F7-B0A0-C049-8967-D842C17DA35B}" type="slidenum">
+              <a:rPr kumimoji="1" lang="zh-TW" altLang="en-US" smtClean="0"/>
+              <a:t>24</a:t>
+            </a:fld>
+            <a:endParaRPr kumimoji="1" lang="zh-TW" altLang="en-US"/>
+          </a:p>
+        </p:txBody>
+      </p:sp>
+    </p:spTree>
+    <p:extLst>
+      <p:ext uri="{BB962C8B-B14F-4D97-AF65-F5344CB8AC3E}">
+        <p14:creationId xmlns:p14="http://schemas.microsoft.com/office/powerpoint/2010/main" val="335099711"/>
       </p:ext>
     </p:extLst>
   </p:cSld>
@@ -2106,7 +2334,7 @@
           <a:p>
             <a:fld id="{11AEC7CD-0132-46A9-805B-E798C8C14E80}" type="datetimeFigureOut">
               <a:rPr lang="zh-TW" altLang="en-US" smtClean="0"/>
-              <a:t>2026/5/14</a:t>
+              <a:t>2026/5/15</a:t>
             </a:fld>
             <a:endParaRPr lang="zh-TW" altLang="en-US"/>
           </a:p>
@@ -2304,7 +2532,7 @@
           <a:p>
             <a:fld id="{11AEC7CD-0132-46A9-805B-E798C8C14E80}" type="datetimeFigureOut">
               <a:rPr lang="zh-TW" altLang="en-US" smtClean="0"/>
-              <a:t>2026/5/14</a:t>
+              <a:t>2026/5/15</a:t>
             </a:fld>
             <a:endParaRPr lang="zh-TW" altLang="en-US"/>
           </a:p>
@@ -2512,7 +2740,7 @@
           <a:p>
             <a:fld id="{11AEC7CD-0132-46A9-805B-E798C8C14E80}" type="datetimeFigureOut">
               <a:rPr lang="zh-TW" altLang="en-US" smtClean="0"/>
-              <a:t>2026/5/14</a:t>
+              <a:t>2026/5/15</a:t>
             </a:fld>
             <a:endParaRPr lang="zh-TW" altLang="en-US"/>
           </a:p>
@@ -2710,7 +2938,7 @@
           <a:p>
             <a:fld id="{11AEC7CD-0132-46A9-805B-E798C8C14E80}" type="datetimeFigureOut">
               <a:rPr lang="zh-TW" altLang="en-US" smtClean="0"/>
-              <a:t>2026/5/14</a:t>
+              <a:t>2026/5/15</a:t>
             </a:fld>
             <a:endParaRPr lang="zh-TW" altLang="en-US"/>
           </a:p>
@@ -2985,7 +3213,7 @@
           <a:p>
             <a:fld id="{11AEC7CD-0132-46A9-805B-E798C8C14E80}" type="datetimeFigureOut">
               <a:rPr lang="zh-TW" altLang="en-US" smtClean="0"/>
-              <a:t>2026/5/14</a:t>
+              <a:t>2026/5/15</a:t>
             </a:fld>
             <a:endParaRPr lang="zh-TW" altLang="en-US"/>
           </a:p>
@@ -3250,7 +3478,7 @@
           <a:p>
             <a:fld id="{11AEC7CD-0132-46A9-805B-E798C8C14E80}" type="datetimeFigureOut">
               <a:rPr lang="zh-TW" altLang="en-US" smtClean="0"/>
-              <a:t>2026/5/14</a:t>
+              <a:t>2026/5/15</a:t>
             </a:fld>
             <a:endParaRPr lang="zh-TW" altLang="en-US"/>
           </a:p>
@@ -3662,7 +3890,7 @@
           <a:p>
             <a:fld id="{11AEC7CD-0132-46A9-805B-E798C8C14E80}" type="datetimeFigureOut">
               <a:rPr lang="zh-TW" altLang="en-US" smtClean="0"/>
-              <a:t>2026/5/14</a:t>
+              <a:t>2026/5/15</a:t>
             </a:fld>
             <a:endParaRPr lang="zh-TW" altLang="en-US"/>
           </a:p>
@@ -3803,7 +4031,7 @@
           <a:p>
             <a:fld id="{11AEC7CD-0132-46A9-805B-E798C8C14E80}" type="datetimeFigureOut">
               <a:rPr lang="zh-TW" altLang="en-US" smtClean="0"/>
-              <a:t>2026/5/14</a:t>
+              <a:t>2026/5/15</a:t>
             </a:fld>
             <a:endParaRPr lang="zh-TW" altLang="en-US"/>
           </a:p>
@@ -3916,7 +4144,7 @@
           <a:p>
             <a:fld id="{11AEC7CD-0132-46A9-805B-E798C8C14E80}" type="datetimeFigureOut">
               <a:rPr lang="zh-TW" altLang="en-US" smtClean="0"/>
-              <a:t>2026/5/14</a:t>
+              <a:t>2026/5/15</a:t>
             </a:fld>
             <a:endParaRPr lang="zh-TW" altLang="en-US"/>
           </a:p>
@@ -4227,7 +4455,7 @@
           <a:p>
             <a:fld id="{11AEC7CD-0132-46A9-805B-E798C8C14E80}" type="datetimeFigureOut">
               <a:rPr lang="zh-TW" altLang="en-US" smtClean="0"/>
-              <a:t>2026/5/14</a:t>
+              <a:t>2026/5/15</a:t>
             </a:fld>
             <a:endParaRPr lang="zh-TW" altLang="en-US"/>
           </a:p>
@@ -4515,7 +4743,7 @@
           <a:p>
             <a:fld id="{11AEC7CD-0132-46A9-805B-E798C8C14E80}" type="datetimeFigureOut">
               <a:rPr lang="zh-TW" altLang="en-US" smtClean="0"/>
-              <a:t>2026/5/14</a:t>
+              <a:t>2026/5/15</a:t>
             </a:fld>
             <a:endParaRPr lang="zh-TW" altLang="en-US"/>
           </a:p>
@@ -4756,7 +4984,7 @@
           <a:p>
             <a:fld id="{11AEC7CD-0132-46A9-805B-E798C8C14E80}" type="datetimeFigureOut">
               <a:rPr lang="zh-TW" altLang="en-US" smtClean="0"/>
-              <a:t>2026/5/14</a:t>
+              <a:t>2026/5/15</a:t>
             </a:fld>
             <a:endParaRPr lang="zh-TW" altLang="en-US"/>
           </a:p>
@@ -12079,7 +12307,7 @@
         <p:cNvPr id="1" name="">
           <a:extLst>
             <a:ext uri="{FF2B5EF4-FFF2-40B4-BE49-F238E27FC236}">
-              <a16:creationId xmlns:a16="http://schemas.microsoft.com/office/drawing/2014/main" id="{1958C00D-9A75-0C1C-9981-44DC692C0A9F}"/>
+              <a16:creationId xmlns:a16="http://schemas.microsoft.com/office/drawing/2014/main" id="{22ED3B4C-D302-521B-B6BF-9F8FE9C554E4}"/>
             </a:ext>
           </a:extLst>
         </p:cNvPr>
@@ -12094,12 +12322,72 @@
           <a:chExt cx="0" cy="0"/>
         </a:xfrm>
       </p:grpSpPr>
+      <p:pic>
+        <p:nvPicPr>
+          <p:cNvPr id="2" name="圖片 1">
+            <a:extLst>
+              <a:ext uri="{FF2B5EF4-FFF2-40B4-BE49-F238E27FC236}">
+                <a16:creationId xmlns:a16="http://schemas.microsoft.com/office/drawing/2014/main" id="{A106CDAD-1614-C469-7F78-1B8667FC584C}"/>
+              </a:ext>
+            </a:extLst>
+          </p:cNvPr>
+          <p:cNvPicPr>
+            <a:picLocks noChangeAspect="1"/>
+          </p:cNvPicPr>
+          <p:nvPr/>
+        </p:nvPicPr>
+        <p:blipFill>
+          <a:blip r:embed="rId3"/>
+          <a:stretch>
+            <a:fillRect/>
+          </a:stretch>
+        </p:blipFill>
+        <p:spPr>
+          <a:xfrm>
+            <a:off x="1131468" y="1877030"/>
+            <a:ext cx="4727943" cy="4297363"/>
+          </a:xfrm>
+          <a:prstGeom prst="rect">
+            <a:avLst/>
+          </a:prstGeom>
+        </p:spPr>
+      </p:pic>
+      <p:pic>
+        <p:nvPicPr>
+          <p:cNvPr id="3" name="圖片 2">
+            <a:extLst>
+              <a:ext uri="{FF2B5EF4-FFF2-40B4-BE49-F238E27FC236}">
+                <a16:creationId xmlns:a16="http://schemas.microsoft.com/office/drawing/2014/main" id="{4FA45DE5-D5DF-D768-B4E0-2E27EC541CA3}"/>
+              </a:ext>
+            </a:extLst>
+          </p:cNvPr>
+          <p:cNvPicPr>
+            <a:picLocks noChangeAspect="1"/>
+          </p:cNvPicPr>
+          <p:nvPr/>
+        </p:nvPicPr>
+        <p:blipFill>
+          <a:blip r:embed="rId4"/>
+          <a:stretch>
+            <a:fillRect/>
+          </a:stretch>
+        </p:blipFill>
+        <p:spPr>
+          <a:xfrm>
+            <a:off x="6217920" y="1877030"/>
+            <a:ext cx="4727943" cy="4297362"/>
+          </a:xfrm>
+          <a:prstGeom prst="rect">
+            <a:avLst/>
+          </a:prstGeom>
+        </p:spPr>
+      </p:pic>
       <p:grpSp>
         <p:nvGrpSpPr>
-          <p:cNvPr id="2" name="群組 1">
+          <p:cNvPr id="8" name="群組 7">
             <a:extLst>
               <a:ext uri="{FF2B5EF4-FFF2-40B4-BE49-F238E27FC236}">
-                <a16:creationId xmlns:a16="http://schemas.microsoft.com/office/drawing/2014/main" id="{D570B749-DC0C-6238-CF5F-149C140801E0}"/>
+                <a16:creationId xmlns:a16="http://schemas.microsoft.com/office/drawing/2014/main" id="{A8C8E759-A2AB-716D-7F47-16EE1D8EE963}"/>
               </a:ext>
             </a:extLst>
           </p:cNvPr>
@@ -12108,18 +12396,18 @@
         </p:nvGrpSpPr>
         <p:grpSpPr>
           <a:xfrm>
-            <a:off x="821689" y="647641"/>
-            <a:ext cx="4748228" cy="488847"/>
-            <a:chOff x="1153295" y="1606171"/>
-            <a:chExt cx="4748228" cy="488847"/>
+            <a:off x="821688" y="647641"/>
+            <a:ext cx="10548621" cy="488847"/>
+            <a:chOff x="1153294" y="1606171"/>
+            <a:chExt cx="10548621" cy="488847"/>
           </a:xfrm>
         </p:grpSpPr>
         <p:sp>
           <p:nvSpPr>
-            <p:cNvPr id="3" name="矩形 2">
+            <p:cNvPr id="9" name="矩形 8">
               <a:extLst>
                 <a:ext uri="{FF2B5EF4-FFF2-40B4-BE49-F238E27FC236}">
-                  <a16:creationId xmlns:a16="http://schemas.microsoft.com/office/drawing/2014/main" id="{A6EECC83-AEBC-4FE5-8AD9-6A4A34C255DC}"/>
+                  <a16:creationId xmlns:a16="http://schemas.microsoft.com/office/drawing/2014/main" id="{406580F3-5FEF-51BE-70D5-EF83F83F12EE}"/>
                 </a:ext>
               </a:extLst>
             </p:cNvPr>
@@ -12128,8 +12416,8 @@
           </p:nvSpPr>
           <p:spPr>
             <a:xfrm>
-              <a:off x="1153295" y="1606171"/>
-              <a:ext cx="4400838" cy="488847"/>
+              <a:off x="1153294" y="1606171"/>
+              <a:ext cx="10274204" cy="488847"/>
             </a:xfrm>
             <a:prstGeom prst="rect">
               <a:avLst/>
@@ -12170,10 +12458,10 @@
         </p:sp>
         <p:sp>
           <p:nvSpPr>
-            <p:cNvPr id="4" name="矩形 3">
+            <p:cNvPr id="10" name="矩形 9">
               <a:extLst>
                 <a:ext uri="{FF2B5EF4-FFF2-40B4-BE49-F238E27FC236}">
-                  <a16:creationId xmlns:a16="http://schemas.microsoft.com/office/drawing/2014/main" id="{CF2A8A71-6536-AB49-73A3-0FAFD988688C}"/>
+                  <a16:creationId xmlns:a16="http://schemas.microsoft.com/office/drawing/2014/main" id="{74749099-920F-4CED-724A-006EA805C950}"/>
                 </a:ext>
               </a:extLst>
             </p:cNvPr>
@@ -12224,10 +12512,10 @@
         </p:sp>
         <p:sp>
           <p:nvSpPr>
-            <p:cNvPr id="6" name="標題 1">
+            <p:cNvPr id="12" name="標題 1">
               <a:extLst>
                 <a:ext uri="{FF2B5EF4-FFF2-40B4-BE49-F238E27FC236}">
-                  <a16:creationId xmlns:a16="http://schemas.microsoft.com/office/drawing/2014/main" id="{74C6F6AA-8064-8AED-2AE5-811DBC7384A9}"/>
+                  <a16:creationId xmlns:a16="http://schemas.microsoft.com/office/drawing/2014/main" id="{221E80E3-B401-EDF4-CE09-F97B59CEB58F}"/>
                 </a:ext>
               </a:extLst>
             </p:cNvPr>
@@ -12293,10 +12581,10 @@
         </p:sp>
         <p:sp>
           <p:nvSpPr>
-            <p:cNvPr id="10" name="副標題 2">
+            <p:cNvPr id="13" name="副標題 2">
               <a:extLst>
                 <a:ext uri="{FF2B5EF4-FFF2-40B4-BE49-F238E27FC236}">
-                  <a16:creationId xmlns:a16="http://schemas.microsoft.com/office/drawing/2014/main" id="{85CBE710-32B3-11C9-4CD2-D8A87D37595E}"/>
+                  <a16:creationId xmlns:a16="http://schemas.microsoft.com/office/drawing/2014/main" id="{D65B9D9E-26A7-B68C-9ABC-0598A6202712}"/>
                 </a:ext>
               </a:extLst>
             </p:cNvPr>
@@ -12307,8 +12595,8 @@
           </p:nvSpPr>
           <p:spPr>
             <a:xfrm>
-              <a:off x="1736547" y="1642137"/>
-              <a:ext cx="4164976" cy="452881"/>
+              <a:off x="1736546" y="1642137"/>
+              <a:ext cx="9965369" cy="452881"/>
             </a:xfrm>
             <a:prstGeom prst="rect">
               <a:avLst/>
@@ -12495,6 +12783,27 @@
                 </a:rPr>
                 <a:t>Statistical Inference</a:t>
               </a:r>
+              <a:r>
+                <a:rPr lang="en-US" altLang="zh-TW" sz="2000" dirty="0">
+                  <a:latin typeface="Cambria" panose="02040503050406030204" pitchFamily="18" charset="0"/>
+                  <a:ea typeface="Songti SC" panose="02010600040101010101" pitchFamily="2" charset="-122"/>
+                </a:rPr>
+                <a:t>: </a:t>
+              </a:r>
+              <a:r>
+                <a:rPr lang="en" altLang="zh-TW" sz="2000" dirty="0">
+                  <a:latin typeface="Cambria" panose="02040503050406030204" pitchFamily="18" charset="0"/>
+                  <a:ea typeface="Songti SC" panose="02010600040101010101" pitchFamily="2" charset="-122"/>
+                </a:rPr>
+                <a:t>Markov Chain Monte Carlo (MCMC)-Metropolis Hastings Algorithm</a:t>
+              </a:r>
+            </a:p>
+            <a:p>
+              <a:pPr algn="l">
+                <a:lnSpc>
+                  <a:spcPct val="100000"/>
+                </a:lnSpc>
+              </a:pPr>
               <a:endParaRPr lang="en-US" altLang="zh-TW" sz="2000" dirty="0">
                 <a:latin typeface="Cambria" panose="02040503050406030204" pitchFamily="18" charset="0"/>
                 <a:ea typeface="Songti SC" panose="02010600040101010101" pitchFamily="2" charset="-122"/>
@@ -12505,10 +12814,10 @@
       </p:grpSp>
       <p:sp>
         <p:nvSpPr>
-          <p:cNvPr id="19" name="文字方塊 18">
+          <p:cNvPr id="15" name="文字方塊 14">
             <a:extLst>
               <a:ext uri="{FF2B5EF4-FFF2-40B4-BE49-F238E27FC236}">
-                <a16:creationId xmlns:a16="http://schemas.microsoft.com/office/drawing/2014/main" id="{8BDA8358-D649-B03C-0C29-5A96E5150762}"/>
+                <a16:creationId xmlns:a16="http://schemas.microsoft.com/office/drawing/2014/main" id="{65A528EC-9606-80C1-6346-7A448039C161}"/>
               </a:ext>
             </a:extLst>
           </p:cNvPr>
@@ -12517,8 +12826,8 @@
         </p:nvSpPr>
         <p:spPr>
           <a:xfrm>
-            <a:off x="1055270" y="2056766"/>
-            <a:ext cx="6725983" cy="646331"/>
+            <a:off x="821688" y="1352134"/>
+            <a:ext cx="1728711" cy="338554"/>
           </a:xfrm>
           <a:prstGeom prst="rect">
             <a:avLst/>
@@ -12526,47 +12835,138 @@
           <a:noFill/>
         </p:spPr>
         <p:txBody>
-          <a:bodyPr wrap="square" rtlCol="0">
+          <a:bodyPr wrap="square">
             <a:spAutoFit/>
           </a:bodyPr>
           <a:lstStyle/>
           <a:p>
-            <a:r>
-              <a:rPr lang="en" altLang="zh-TW" dirty="0">
+            <a:pPr marL="285750" indent="-285750" algn="ctr" latinLnBrk="1">
+              <a:buFont typeface="Arial" panose="020B0604020202020204" pitchFamily="34" charset="0"/>
+              <a:buChar char="•"/>
+            </a:pPr>
+            <a:r>
+              <a:rPr lang="en-US" altLang="zh-TW" sz="1600" i="0" kern="1200" dirty="0" err="1">
                 <a:solidFill>
-                  <a:schemeClr val="tx1">
-                    <a:lumMod val="75000"/>
-                    <a:lumOff val="25000"/>
-                  </a:schemeClr>
+                  <a:schemeClr val="tx1"/>
                 </a:solidFill>
-                <a:latin typeface="+mj-ea"/>
-                <a:ea typeface="+mj-ea"/>
+                <a:effectLst/>
+                <a:latin typeface="Cambria" panose="02040503050406030204" pitchFamily="18" charset="0"/>
               </a:rPr>
-              <a:t>Markov Chain Monte Carlo (MCMC)-Metropolis Hastings Algorithm</a:t>
-            </a:r>
-          </a:p>
-          <a:p>
-            <a:r>
-              <a:rPr kumimoji="1" lang="en-US" altLang="zh-TW" dirty="0">
-                <a:latin typeface="+mj-ea"/>
-                <a:ea typeface="+mj-ea"/>
+              <a:t>N_iter</a:t>
+            </a:r>
+            <a:r>
+              <a:rPr lang="en-US" altLang="zh-TW" sz="1600" i="0" kern="1200" dirty="0">
+                <a:solidFill>
+                  <a:schemeClr val="tx1"/>
+                </a:solidFill>
+                <a:effectLst/>
+                <a:latin typeface="Cambria" panose="02040503050406030204" pitchFamily="18" charset="0"/>
               </a:rPr>
-              <a:t>Leave one out:</a:t>
-            </a:r>
-            <a:r>
-              <a:rPr kumimoji="1" lang="zh-TW" altLang="en-US" dirty="0">
-                <a:latin typeface="+mj-ea"/>
-                <a:ea typeface="+mj-ea"/>
+              <a:t>: 10000</a:t>
+            </a:r>
+          </a:p>
+        </p:txBody>
+      </p:sp>
+      <p:sp>
+        <p:nvSpPr>
+          <p:cNvPr id="16" name="文字方塊 15">
+            <a:extLst>
+              <a:ext uri="{FF2B5EF4-FFF2-40B4-BE49-F238E27FC236}">
+                <a16:creationId xmlns:a16="http://schemas.microsoft.com/office/drawing/2014/main" id="{EF76D41B-F114-F17A-85F6-B32029DA1AAF}"/>
+              </a:ext>
+            </a:extLst>
+          </p:cNvPr>
+          <p:cNvSpPr txBox="1"/>
+          <p:nvPr/>
+        </p:nvSpPr>
+        <p:spPr>
+          <a:xfrm>
+            <a:off x="4045922" y="2606499"/>
+            <a:ext cx="2050078" cy="307777"/>
+          </a:xfrm>
+          <a:prstGeom prst="rect">
+            <a:avLst/>
+          </a:prstGeom>
+          <a:noFill/>
+        </p:spPr>
+        <p:txBody>
+          <a:bodyPr wrap="square">
+            <a:spAutoFit/>
+          </a:bodyPr>
+          <a:lstStyle/>
+          <a:p>
+            <a:pPr algn="ctr" latinLnBrk="1"/>
+            <a:r>
+              <a:rPr lang="en-US" altLang="zh-TW" sz="1400" dirty="0">
+                <a:solidFill>
+                  <a:schemeClr val="accent1"/>
+                </a:solidFill>
+                <a:latin typeface="Cambria" panose="02040503050406030204" pitchFamily="18" charset="0"/>
               </a:rPr>
-              <a:t>看有沒有人會特別影響整體平均、勝率的穩定性</a:t>
-            </a:r>
+              <a:t>Probability:0.6653407</a:t>
+            </a:r>
+            <a:endParaRPr lang="en-US" altLang="zh-TW" sz="1400" i="0" kern="1200" dirty="0">
+              <a:solidFill>
+                <a:schemeClr val="accent1"/>
+              </a:solidFill>
+              <a:effectLst/>
+              <a:latin typeface="Cambria" panose="02040503050406030204" pitchFamily="18" charset="0"/>
+            </a:endParaRPr>
+          </a:p>
+        </p:txBody>
+      </p:sp>
+      <p:sp>
+        <p:nvSpPr>
+          <p:cNvPr id="17" name="文字方塊 16">
+            <a:extLst>
+              <a:ext uri="{FF2B5EF4-FFF2-40B4-BE49-F238E27FC236}">
+                <a16:creationId xmlns:a16="http://schemas.microsoft.com/office/drawing/2014/main" id="{33BB40A4-0A5E-37E3-AA0B-42E103A5B6E8}"/>
+              </a:ext>
+            </a:extLst>
+          </p:cNvPr>
+          <p:cNvSpPr txBox="1"/>
+          <p:nvPr/>
+        </p:nvSpPr>
+        <p:spPr>
+          <a:xfrm>
+            <a:off x="9160466" y="2606499"/>
+            <a:ext cx="2050078" cy="307777"/>
+          </a:xfrm>
+          <a:prstGeom prst="rect">
+            <a:avLst/>
+          </a:prstGeom>
+          <a:noFill/>
+        </p:spPr>
+        <p:txBody>
+          <a:bodyPr wrap="square">
+            <a:spAutoFit/>
+          </a:bodyPr>
+          <a:lstStyle/>
+          <a:p>
+            <a:pPr algn="ctr" latinLnBrk="1"/>
+            <a:r>
+              <a:rPr lang="en-US" altLang="zh-TW" sz="1400" dirty="0">
+                <a:solidFill>
+                  <a:schemeClr val="accent1"/>
+                </a:solidFill>
+                <a:latin typeface="Cambria" panose="02040503050406030204" pitchFamily="18" charset="0"/>
+              </a:rPr>
+              <a:t>Probability: 0.3391910</a:t>
+            </a:r>
+            <a:endParaRPr lang="en-US" altLang="zh-TW" sz="1400" i="0" kern="1200" dirty="0">
+              <a:solidFill>
+                <a:schemeClr val="accent1"/>
+              </a:solidFill>
+              <a:effectLst/>
+              <a:latin typeface="Cambria" panose="02040503050406030204" pitchFamily="18" charset="0"/>
+            </a:endParaRPr>
           </a:p>
         </p:txBody>
       </p:sp>
     </p:spTree>
     <p:extLst>
       <p:ext uri="{BB962C8B-B14F-4D97-AF65-F5344CB8AC3E}">
-        <p14:creationId xmlns:p14="http://schemas.microsoft.com/office/powerpoint/2010/main" val="2936603515"/>
+        <p14:creationId xmlns:p14="http://schemas.microsoft.com/office/powerpoint/2010/main" val="244407228"/>
       </p:ext>
     </p:extLst>
   </p:cSld>
@@ -12584,7 +12984,7 @@
         <p:cNvPr id="1" name="">
           <a:extLst>
             <a:ext uri="{FF2B5EF4-FFF2-40B4-BE49-F238E27FC236}">
-              <a16:creationId xmlns:a16="http://schemas.microsoft.com/office/drawing/2014/main" id="{F6F28756-F771-CD75-6EE2-059E33FDD347}"/>
+              <a16:creationId xmlns:a16="http://schemas.microsoft.com/office/drawing/2014/main" id="{CF2B5D49-8009-930F-FDBF-1130924BBC1E}"/>
             </a:ext>
           </a:extLst>
         </p:cNvPr>
@@ -12601,46 +13001,117 @@
       </p:grpSpPr>
       <p:sp>
         <p:nvSpPr>
-          <p:cNvPr id="2" name="標題 1">
+          <p:cNvPr id="19" name="文字方塊 18">
             <a:extLst>
               <a:ext uri="{FF2B5EF4-FFF2-40B4-BE49-F238E27FC236}">
-                <a16:creationId xmlns:a16="http://schemas.microsoft.com/office/drawing/2014/main" id="{21A078E2-DFBD-521C-F7B6-59B366924D14}"/>
+                <a16:creationId xmlns:a16="http://schemas.microsoft.com/office/drawing/2014/main" id="{8AC0167C-6A07-356C-0184-B5C16C6F5A6A}"/>
               </a:ext>
             </a:extLst>
           </p:cNvPr>
-          <p:cNvSpPr>
-            <a:spLocks noGrp="1"/>
-          </p:cNvSpPr>
-          <p:nvPr>
-            <p:ph type="title"/>
-          </p:nvPr>
+          <p:cNvSpPr txBox="1"/>
+          <p:nvPr/>
         </p:nvSpPr>
-        <p:spPr/>
+        <p:spPr>
+          <a:xfrm>
+            <a:off x="3413833" y="6096526"/>
+            <a:ext cx="9773515" cy="646331"/>
+          </a:xfrm>
+          <a:prstGeom prst="rect">
+            <a:avLst/>
+          </a:prstGeom>
+          <a:noFill/>
+        </p:spPr>
         <p:txBody>
-          <a:bodyPr/>
+          <a:bodyPr wrap="square" rtlCol="0">
+            <a:spAutoFit/>
+          </a:bodyPr>
           <a:lstStyle/>
           <a:p>
             <a:r>
-              <a:rPr lang="zh-TW" altLang="en-US" dirty="0"/>
-              <a:t>使用</a:t>
-            </a:r>
-            <a:r>
-              <a:rPr lang="en-US" altLang="zh-TW" dirty="0"/>
-              <a:t>MCMC</a:t>
-            </a:r>
-            <a:r>
-              <a:rPr lang="zh-TW" altLang="en-US" dirty="0"/>
-              <a:t>估計換門的勝率</a:t>
+              <a:rPr kumimoji="1" lang="en" altLang="zh-TW" dirty="0">
+                <a:latin typeface="+mj-ea"/>
+                <a:ea typeface="+mj-ea"/>
+              </a:rPr>
+              <a:t>burn-in </a:t>
+            </a:r>
+            <a:r>
+              <a:rPr kumimoji="1" lang="en" altLang="zh-TW" dirty="0" err="1">
+                <a:latin typeface="+mj-ea"/>
+                <a:ea typeface="+mj-ea"/>
+              </a:rPr>
+              <a:t>period:chain</a:t>
+            </a:r>
+            <a:r>
+              <a:rPr kumimoji="1" lang="zh-TW" altLang="en-US" dirty="0">
+                <a:latin typeface="+mj-ea"/>
+                <a:ea typeface="+mj-ea"/>
+              </a:rPr>
+              <a:t>前</a:t>
+            </a:r>
+            <a:r>
+              <a:rPr kumimoji="1" lang="en-US" altLang="zh-TW" dirty="0">
+                <a:latin typeface="+mj-ea"/>
+                <a:ea typeface="+mj-ea"/>
+              </a:rPr>
+              <a:t>2000</a:t>
+            </a:r>
+            <a:r>
+              <a:rPr kumimoji="1" lang="zh-TW" altLang="en-US" dirty="0">
+                <a:latin typeface="+mj-ea"/>
+                <a:ea typeface="+mj-ea"/>
+              </a:rPr>
+              <a:t>次的抽樣先不用 </a:t>
+            </a:r>
+            <a:r>
+              <a:rPr kumimoji="1" lang="en-US" altLang="zh-TW" dirty="0">
+                <a:latin typeface="+mj-ea"/>
+                <a:ea typeface="+mj-ea"/>
+              </a:rPr>
+              <a:t>-&gt;</a:t>
+            </a:r>
+            <a:r>
+              <a:rPr kumimoji="1" lang="zh-TW" altLang="en-US" dirty="0">
+                <a:latin typeface="+mj-ea"/>
+                <a:ea typeface="+mj-ea"/>
+              </a:rPr>
+              <a:t>從</a:t>
+            </a:r>
+            <a:r>
+              <a:rPr kumimoji="1" lang="en" altLang="zh-TW" dirty="0">
+                <a:latin typeface="+mj-ea"/>
+                <a:ea typeface="+mj-ea"/>
+              </a:rPr>
+              <a:t>trace plot</a:t>
+            </a:r>
+            <a:r>
+              <a:rPr kumimoji="1" lang="zh-TW" altLang="en-US" dirty="0">
+                <a:latin typeface="+mj-ea"/>
+                <a:ea typeface="+mj-ea"/>
+              </a:rPr>
+              <a:t>可知前期波動大</a:t>
+            </a:r>
+            <a:endParaRPr kumimoji="1" lang="en-US" altLang="zh-TW" dirty="0">
+              <a:latin typeface="+mj-ea"/>
+              <a:ea typeface="+mj-ea"/>
+            </a:endParaRPr>
+          </a:p>
+          <a:p>
+            <a:r>
+              <a:rPr kumimoji="1" lang="zh-TW" altLang="en-US" dirty="0">
+                <a:latin typeface="+mj-ea"/>
+                <a:ea typeface="+mj-ea"/>
+              </a:rPr>
+              <a:t>兩個抽樣機率的分佈都是穩定落在相同區間</a:t>
             </a:r>
           </a:p>
         </p:txBody>
       </p:sp>
       <p:pic>
         <p:nvPicPr>
-          <p:cNvPr id="4" name="圖片 3">
+          <p:cNvPr id="5" name="圖片 4">
             <a:extLst>
               <a:ext uri="{FF2B5EF4-FFF2-40B4-BE49-F238E27FC236}">
-                <a16:creationId xmlns:a16="http://schemas.microsoft.com/office/drawing/2014/main" id="{0F0CB0EF-6BB0-7696-FAB6-C8B5DB836E17}"/>
+                <a16:creationId xmlns:a16="http://schemas.microsoft.com/office/drawing/2014/main" id="{C53D3DFC-9AA6-32DF-976F-274A98BC4321}"/>
               </a:ext>
             </a:extLst>
           </p:cNvPr>
@@ -12650,672 +13121,573 @@
           <p:nvPr/>
         </p:nvPicPr>
         <p:blipFill>
-          <a:blip r:embed="rId2"/>
+          <a:blip r:embed="rId3"/>
           <a:stretch>
             <a:fillRect/>
           </a:stretch>
         </p:blipFill>
         <p:spPr>
           <a:xfrm>
-            <a:off x="259748" y="1407794"/>
-            <a:ext cx="8150497" cy="4042411"/>
+            <a:off x="990190" y="1690688"/>
+            <a:ext cx="4847287" cy="4405838"/>
           </a:xfrm>
           <a:prstGeom prst="rect">
             <a:avLst/>
           </a:prstGeom>
         </p:spPr>
       </p:pic>
-      <p:graphicFrame>
-        <p:nvGraphicFramePr>
-          <p:cNvPr id="5" name="表格 4">
+      <p:pic>
+        <p:nvPicPr>
+          <p:cNvPr id="11" name="圖片 10">
             <a:extLst>
               <a:ext uri="{FF2B5EF4-FFF2-40B4-BE49-F238E27FC236}">
-                <a16:creationId xmlns:a16="http://schemas.microsoft.com/office/drawing/2014/main" id="{E4934B2A-18C0-CA38-B66F-0C20CDEE6355}"/>
+                <a16:creationId xmlns:a16="http://schemas.microsoft.com/office/drawing/2014/main" id="{4FB4DC99-80A4-3478-C531-1F89234B8542}"/>
               </a:ext>
             </a:extLst>
           </p:cNvPr>
-          <p:cNvGraphicFramePr>
-            <a:graphicFrameLocks noGrp="1"/>
-          </p:cNvGraphicFramePr>
-          <p:nvPr>
-            <p:extLst>
-              <p:ext uri="{D42A27DB-BD31-4B8C-83A1-F6EECF244321}">
-                <p14:modId xmlns:p14="http://schemas.microsoft.com/office/powerpoint/2010/main" val="1532637344"/>
-              </p:ext>
-            </p:extLst>
-          </p:nvPr>
-        </p:nvGraphicFramePr>
-        <p:xfrm>
-          <a:off x="8481213" y="4761143"/>
-          <a:ext cx="3573420" cy="1240249"/>
-        </p:xfrm>
-        <a:graphic>
-          <a:graphicData uri="http://schemas.openxmlformats.org/drawingml/2006/table">
-            <a:tbl>
-              <a:tblPr firstRow="1" bandRow="1">
-                <a:tableStyleId>{5C22544A-7EE6-4342-B048-85BDC9FD1C3A}</a:tableStyleId>
-              </a:tblPr>
-              <a:tblGrid>
-                <a:gridCol w="893355">
-                  <a:extLst>
-                    <a:ext uri="{9D8B030D-6E8A-4147-A177-3AD203B41FA5}">
-                      <a16:colId xmlns:a16="http://schemas.microsoft.com/office/drawing/2014/main" val="3945390195"/>
-                    </a:ext>
-                  </a:extLst>
-                </a:gridCol>
-                <a:gridCol w="893355">
-                  <a:extLst>
-                    <a:ext uri="{9D8B030D-6E8A-4147-A177-3AD203B41FA5}">
-                      <a16:colId xmlns:a16="http://schemas.microsoft.com/office/drawing/2014/main" val="1634968925"/>
-                    </a:ext>
-                  </a:extLst>
-                </a:gridCol>
-                <a:gridCol w="893355">
-                  <a:extLst>
-                    <a:ext uri="{9D8B030D-6E8A-4147-A177-3AD203B41FA5}">
-                      <a16:colId xmlns:a16="http://schemas.microsoft.com/office/drawing/2014/main" val="2116488310"/>
-                    </a:ext>
-                  </a:extLst>
-                </a:gridCol>
-                <a:gridCol w="893355">
-                  <a:extLst>
-                    <a:ext uri="{9D8B030D-6E8A-4147-A177-3AD203B41FA5}">
-                      <a16:colId xmlns:a16="http://schemas.microsoft.com/office/drawing/2014/main" val="1012104654"/>
-                    </a:ext>
-                  </a:extLst>
-                </a:gridCol>
-              </a:tblGrid>
-              <a:tr h="542703">
-                <a:tc>
-                  <a:txBody>
-                    <a:bodyPr/>
-                    <a:lstStyle/>
-                    <a:p>
-                      <a:pPr algn="ctr"/>
-                      <a:endParaRPr lang="zh-TW" altLang="en-US" sz="1200" b="0" dirty="0">
-                        <a:solidFill>
-                          <a:schemeClr val="tx1"/>
-                        </a:solidFill>
-                      </a:endParaRPr>
-                    </a:p>
-                  </a:txBody>
-                  <a:tcPr anchor="ctr">
-                    <a:lnL w="12700" cap="flat" cmpd="sng" algn="ctr">
-                      <a:solidFill>
-                        <a:schemeClr val="tx1"/>
-                      </a:solidFill>
-                      <a:prstDash val="solid"/>
-                      <a:round/>
-                      <a:headEnd type="none" w="med" len="med"/>
-                      <a:tailEnd type="none" w="med" len="med"/>
-                    </a:lnL>
-                    <a:lnR w="12700" cap="flat" cmpd="sng" algn="ctr">
-                      <a:solidFill>
-                        <a:schemeClr val="tx1"/>
-                      </a:solidFill>
-                      <a:prstDash val="solid"/>
-                      <a:round/>
-                      <a:headEnd type="none" w="med" len="med"/>
-                      <a:tailEnd type="none" w="med" len="med"/>
-                    </a:lnR>
-                    <a:lnT w="12700" cap="flat" cmpd="sng" algn="ctr">
-                      <a:solidFill>
-                        <a:schemeClr val="tx1"/>
-                      </a:solidFill>
-                      <a:prstDash val="solid"/>
-                      <a:round/>
-                      <a:headEnd type="none" w="med" len="med"/>
-                      <a:tailEnd type="none" w="med" len="med"/>
-                    </a:lnT>
-                    <a:lnB w="12700" cap="flat" cmpd="sng" algn="ctr">
-                      <a:solidFill>
-                        <a:schemeClr val="tx1"/>
-                      </a:solidFill>
-                      <a:prstDash val="solid"/>
-                      <a:round/>
-                      <a:headEnd type="none" w="med" len="med"/>
-                      <a:tailEnd type="none" w="med" len="med"/>
-                    </a:lnB>
-                    <a:noFill/>
-                  </a:tcPr>
-                </a:tc>
-                <a:tc>
-                  <a:txBody>
-                    <a:bodyPr/>
-                    <a:lstStyle/>
-                    <a:p>
-                      <a:pPr algn="ctr" latinLnBrk="1"/>
-                      <a:r>
-                        <a:rPr lang="en-US" altLang="zh-TW" sz="1200" b="1" i="0" kern="1200" dirty="0" err="1">
-                          <a:solidFill>
-                            <a:schemeClr val="tx1"/>
-                          </a:solidFill>
-                          <a:effectLst/>
-                          <a:latin typeface="+mn-lt"/>
-                          <a:ea typeface="+mn-ea"/>
-                          <a:cs typeface="+mn-cs"/>
-                        </a:rPr>
-                        <a:t>N_iter</a:t>
-                      </a:r>
-                      <a:endParaRPr lang="en-US" altLang="zh-TW" sz="1200" b="1" i="0" kern="1200" dirty="0">
-                        <a:solidFill>
-                          <a:schemeClr val="tx1"/>
-                        </a:solidFill>
-                        <a:effectLst/>
-                        <a:latin typeface="+mn-lt"/>
-                        <a:ea typeface="+mn-ea"/>
-                        <a:cs typeface="+mn-cs"/>
-                      </a:endParaRPr>
-                    </a:p>
-                  </a:txBody>
-                  <a:tcPr anchor="ctr">
-                    <a:lnL w="12700" cap="flat" cmpd="sng" algn="ctr">
-                      <a:solidFill>
-                        <a:schemeClr val="tx1"/>
-                      </a:solidFill>
-                      <a:prstDash val="solid"/>
-                      <a:round/>
-                      <a:headEnd type="none" w="med" len="med"/>
-                      <a:tailEnd type="none" w="med" len="med"/>
-                    </a:lnL>
-                    <a:lnR w="12700" cap="flat" cmpd="sng" algn="ctr">
-                      <a:solidFill>
-                        <a:schemeClr val="tx1"/>
-                      </a:solidFill>
-                      <a:prstDash val="solid"/>
-                      <a:round/>
-                      <a:headEnd type="none" w="med" len="med"/>
-                      <a:tailEnd type="none" w="med" len="med"/>
-                    </a:lnR>
-                    <a:lnT w="12700" cap="flat" cmpd="sng" algn="ctr">
-                      <a:solidFill>
-                        <a:schemeClr val="tx1"/>
-                      </a:solidFill>
-                      <a:prstDash val="solid"/>
-                      <a:round/>
-                      <a:headEnd type="none" w="med" len="med"/>
-                      <a:tailEnd type="none" w="med" len="med"/>
-                    </a:lnT>
-                    <a:lnB w="12700" cap="flat" cmpd="sng" algn="ctr">
-                      <a:solidFill>
-                        <a:schemeClr val="tx1"/>
-                      </a:solidFill>
-                      <a:prstDash val="solid"/>
-                      <a:round/>
-                      <a:headEnd type="none" w="med" len="med"/>
-                      <a:tailEnd type="none" w="med" len="med"/>
-                    </a:lnB>
-                    <a:noFill/>
-                  </a:tcPr>
-                </a:tc>
-                <a:tc>
-                  <a:txBody>
-                    <a:bodyPr/>
-                    <a:lstStyle/>
-                    <a:p>
-                      <a:pPr algn="ctr" latinLnBrk="1"/>
-                      <a:r>
-                        <a:rPr lang="en-US" altLang="zh-TW" sz="1200" b="1" i="0" kern="1200" dirty="0" err="1">
-                          <a:solidFill>
-                            <a:schemeClr val="tx1"/>
-                          </a:solidFill>
-                          <a:effectLst/>
-                          <a:latin typeface="+mn-lt"/>
-                          <a:ea typeface="+mn-ea"/>
-                          <a:cs typeface="+mn-cs"/>
-                        </a:rPr>
-                        <a:t>Porb</a:t>
-                      </a:r>
-                      <a:r>
-                        <a:rPr lang="en-US" altLang="zh-TW" sz="1200" b="1" i="0" kern="1200" dirty="0">
-                          <a:solidFill>
-                            <a:schemeClr val="tx1"/>
-                          </a:solidFill>
-                          <a:effectLst/>
-                          <a:latin typeface="+mn-lt"/>
-                          <a:ea typeface="+mn-ea"/>
-                          <a:cs typeface="+mn-cs"/>
-                        </a:rPr>
-                        <a:t> _Start</a:t>
-                      </a:r>
-                    </a:p>
-                  </a:txBody>
-                  <a:tcPr anchor="ctr">
-                    <a:lnL w="12700" cap="flat" cmpd="sng" algn="ctr">
-                      <a:solidFill>
-                        <a:schemeClr val="tx1"/>
-                      </a:solidFill>
-                      <a:prstDash val="solid"/>
-                      <a:round/>
-                      <a:headEnd type="none" w="med" len="med"/>
-                      <a:tailEnd type="none" w="med" len="med"/>
-                    </a:lnL>
-                    <a:lnR w="12700" cap="flat" cmpd="sng" algn="ctr">
-                      <a:solidFill>
-                        <a:schemeClr val="tx1"/>
-                      </a:solidFill>
-                      <a:prstDash val="solid"/>
-                      <a:round/>
-                      <a:headEnd type="none" w="med" len="med"/>
-                      <a:tailEnd type="none" w="med" len="med"/>
-                    </a:lnR>
-                    <a:lnT w="12700" cap="flat" cmpd="sng" algn="ctr">
-                      <a:solidFill>
-                        <a:schemeClr val="tx1"/>
-                      </a:solidFill>
-                      <a:prstDash val="solid"/>
-                      <a:round/>
-                      <a:headEnd type="none" w="med" len="med"/>
-                      <a:tailEnd type="none" w="med" len="med"/>
-                    </a:lnT>
-                    <a:lnB w="12700" cap="flat" cmpd="sng" algn="ctr">
-                      <a:solidFill>
-                        <a:schemeClr val="tx1"/>
-                      </a:solidFill>
-                      <a:prstDash val="solid"/>
-                      <a:round/>
-                      <a:headEnd type="none" w="med" len="med"/>
-                      <a:tailEnd type="none" w="med" len="med"/>
-                    </a:lnB>
-                    <a:noFill/>
-                  </a:tcPr>
-                </a:tc>
-                <a:tc>
-                  <a:txBody>
-                    <a:bodyPr/>
-                    <a:lstStyle/>
-                    <a:p>
-                      <a:pPr marL="0" marR="0" lvl="0" indent="0" algn="ctr" defTabSz="914400" rtl="0" eaLnBrk="1" fontAlgn="auto" latinLnBrk="0" hangingPunct="1">
-                        <a:lnSpc>
-                          <a:spcPct val="100000"/>
-                        </a:lnSpc>
-                        <a:spcBef>
-                          <a:spcPts val="0"/>
-                        </a:spcBef>
-                        <a:spcAft>
-                          <a:spcPts val="0"/>
-                        </a:spcAft>
-                        <a:buClrTx/>
-                        <a:buSzTx/>
-                        <a:buFontTx/>
-                        <a:buNone/>
-                        <a:tabLst/>
-                        <a:defRPr/>
-                      </a:pPr>
-                      <a:r>
-                        <a:rPr lang="en-US" altLang="zh-TW" sz="1200" dirty="0">
-                          <a:solidFill>
-                            <a:schemeClr val="tx1"/>
-                          </a:solidFill>
-                        </a:rPr>
-                        <a:t>proposal </a:t>
-                      </a:r>
-                      <a:r>
-                        <a:rPr lang="en-US" altLang="zh-TW" sz="1200" dirty="0" err="1">
-                          <a:solidFill>
-                            <a:schemeClr val="tx1"/>
-                          </a:solidFill>
-                        </a:rPr>
-                        <a:t>sd</a:t>
-                      </a:r>
-                      <a:endParaRPr lang="en-US" altLang="zh-TW" sz="1200" b="0" i="0" kern="1200" dirty="0">
-                        <a:solidFill>
-                          <a:schemeClr val="tx1"/>
-                        </a:solidFill>
-                        <a:effectLst/>
-                        <a:latin typeface="+mn-lt"/>
-                        <a:ea typeface="+mn-ea"/>
-                        <a:cs typeface="+mn-cs"/>
-                      </a:endParaRPr>
-                    </a:p>
-                  </a:txBody>
-                  <a:tcPr anchor="ctr">
-                    <a:lnL w="12700" cap="flat" cmpd="sng" algn="ctr">
-                      <a:solidFill>
-                        <a:schemeClr val="tx1"/>
-                      </a:solidFill>
-                      <a:prstDash val="solid"/>
-                      <a:round/>
-                      <a:headEnd type="none" w="med" len="med"/>
-                      <a:tailEnd type="none" w="med" len="med"/>
-                    </a:lnL>
-                    <a:lnR w="12700" cap="flat" cmpd="sng" algn="ctr">
-                      <a:solidFill>
-                        <a:schemeClr val="tx1"/>
-                      </a:solidFill>
-                      <a:prstDash val="solid"/>
-                      <a:round/>
-                      <a:headEnd type="none" w="med" len="med"/>
-                      <a:tailEnd type="none" w="med" len="med"/>
-                    </a:lnR>
-                    <a:lnT w="12700" cap="flat" cmpd="sng" algn="ctr">
-                      <a:solidFill>
-                        <a:schemeClr val="tx1"/>
-                      </a:solidFill>
-                      <a:prstDash val="solid"/>
-                      <a:round/>
-                      <a:headEnd type="none" w="med" len="med"/>
-                      <a:tailEnd type="none" w="med" len="med"/>
-                    </a:lnT>
-                    <a:lnB w="12700" cap="flat" cmpd="sng" algn="ctr">
-                      <a:solidFill>
-                        <a:schemeClr val="tx1"/>
-                      </a:solidFill>
-                      <a:prstDash val="solid"/>
-                      <a:round/>
-                      <a:headEnd type="none" w="med" len="med"/>
-                      <a:tailEnd type="none" w="med" len="med"/>
-                    </a:lnB>
-                    <a:noFill/>
-                  </a:tcPr>
-                </a:tc>
-                <a:extLst>
-                  <a:ext uri="{0D108BD9-81ED-4DB2-BD59-A6C34878D82A}">
-                    <a16:rowId xmlns:a16="http://schemas.microsoft.com/office/drawing/2014/main" val="3221030795"/>
-                  </a:ext>
-                </a:extLst>
-              </a:tr>
-              <a:tr h="697546">
-                <a:tc>
-                  <a:txBody>
-                    <a:bodyPr/>
-                    <a:lstStyle/>
-                    <a:p>
-                      <a:pPr marL="0" marR="0" lvl="0" indent="0" algn="ctr" defTabSz="914400" rtl="0" eaLnBrk="1" fontAlgn="auto" latinLnBrk="0" hangingPunct="1">
-                        <a:lnSpc>
-                          <a:spcPct val="100000"/>
-                        </a:lnSpc>
-                        <a:spcBef>
-                          <a:spcPts val="0"/>
-                        </a:spcBef>
-                        <a:spcAft>
-                          <a:spcPts val="0"/>
-                        </a:spcAft>
-                        <a:buClrTx/>
-                        <a:buSzTx/>
-                        <a:buFontTx/>
-                        <a:buNone/>
-                        <a:tabLst/>
-                        <a:defRPr/>
-                      </a:pPr>
-                      <a:r>
-                        <a:rPr lang="en-US" altLang="zh-TW" sz="1200" b="0" i="0" kern="1200" dirty="0">
-                          <a:solidFill>
-                            <a:schemeClr val="tx1"/>
-                          </a:solidFill>
-                          <a:effectLst/>
-                          <a:latin typeface="+mn-lt"/>
-                          <a:ea typeface="+mn-ea"/>
-                          <a:cs typeface="+mn-cs"/>
-                        </a:rPr>
-                        <a:t>Value </a:t>
-                      </a:r>
-                      <a:endParaRPr lang="zh-TW" altLang="en-US" sz="1200" b="0" i="0" kern="1200" dirty="0">
-                        <a:solidFill>
-                          <a:schemeClr val="tx1"/>
-                        </a:solidFill>
-                        <a:effectLst/>
-                        <a:latin typeface="+mn-lt"/>
-                        <a:ea typeface="+mn-ea"/>
-                        <a:cs typeface="+mn-cs"/>
-                      </a:endParaRPr>
-                    </a:p>
-                  </a:txBody>
-                  <a:tcPr anchor="ctr">
-                    <a:lnL w="12700" cap="flat" cmpd="sng" algn="ctr">
-                      <a:solidFill>
-                        <a:schemeClr val="tx1"/>
-                      </a:solidFill>
-                      <a:prstDash val="solid"/>
-                      <a:round/>
-                      <a:headEnd type="none" w="med" len="med"/>
-                      <a:tailEnd type="none" w="med" len="med"/>
-                    </a:lnL>
-                    <a:lnR w="12700" cap="flat" cmpd="sng" algn="ctr">
-                      <a:solidFill>
-                        <a:schemeClr val="tx1"/>
-                      </a:solidFill>
-                      <a:prstDash val="solid"/>
-                      <a:round/>
-                      <a:headEnd type="none" w="med" len="med"/>
-                      <a:tailEnd type="none" w="med" len="med"/>
-                    </a:lnR>
-                    <a:lnT w="12700" cap="flat" cmpd="sng" algn="ctr">
-                      <a:solidFill>
-                        <a:schemeClr val="tx1"/>
-                      </a:solidFill>
-                      <a:prstDash val="solid"/>
-                      <a:round/>
-                      <a:headEnd type="none" w="med" len="med"/>
-                      <a:tailEnd type="none" w="med" len="med"/>
-                    </a:lnT>
-                    <a:lnB w="12700" cap="flat" cmpd="sng" algn="ctr">
-                      <a:solidFill>
-                        <a:schemeClr val="tx1"/>
-                      </a:solidFill>
-                      <a:prstDash val="solid"/>
-                      <a:round/>
-                      <a:headEnd type="none" w="med" len="med"/>
-                      <a:tailEnd type="none" w="med" len="med"/>
-                    </a:lnB>
-                    <a:noFill/>
-                  </a:tcPr>
-                </a:tc>
-                <a:tc>
-                  <a:txBody>
-                    <a:bodyPr/>
-                    <a:lstStyle/>
-                    <a:p>
-                      <a:pPr algn="ctr" latinLnBrk="1"/>
-                      <a:r>
-                        <a:rPr lang="en-US" altLang="zh-TW" sz="1200" dirty="0">
-                          <a:solidFill>
-                            <a:schemeClr val="tx1"/>
-                          </a:solidFill>
-                        </a:rPr>
-                        <a:t>10000</a:t>
-                      </a:r>
-                      <a:endParaRPr lang="en-US" altLang="zh-TW" sz="1200" b="0" i="0" kern="1200" dirty="0">
-                        <a:solidFill>
-                          <a:schemeClr val="tx1"/>
-                        </a:solidFill>
-                        <a:effectLst/>
-                        <a:latin typeface="+mn-lt"/>
-                        <a:ea typeface="+mn-ea"/>
-                        <a:cs typeface="+mn-cs"/>
-                      </a:endParaRPr>
-                    </a:p>
-                  </a:txBody>
-                  <a:tcPr anchor="ctr">
-                    <a:lnL w="12700" cap="flat" cmpd="sng" algn="ctr">
-                      <a:solidFill>
-                        <a:schemeClr val="tx1"/>
-                      </a:solidFill>
-                      <a:prstDash val="solid"/>
-                      <a:round/>
-                      <a:headEnd type="none" w="med" len="med"/>
-                      <a:tailEnd type="none" w="med" len="med"/>
-                    </a:lnL>
-                    <a:lnR w="12700" cap="flat" cmpd="sng" algn="ctr">
-                      <a:solidFill>
-                        <a:schemeClr val="tx1"/>
-                      </a:solidFill>
-                      <a:prstDash val="solid"/>
-                      <a:round/>
-                      <a:headEnd type="none" w="med" len="med"/>
-                      <a:tailEnd type="none" w="med" len="med"/>
-                    </a:lnR>
-                    <a:lnT w="12700" cap="flat" cmpd="sng" algn="ctr">
-                      <a:solidFill>
-                        <a:schemeClr val="tx1"/>
-                      </a:solidFill>
-                      <a:prstDash val="solid"/>
-                      <a:round/>
-                      <a:headEnd type="none" w="med" len="med"/>
-                      <a:tailEnd type="none" w="med" len="med"/>
-                    </a:lnT>
-                    <a:lnB w="12700" cap="flat" cmpd="sng" algn="ctr">
-                      <a:solidFill>
-                        <a:schemeClr val="tx1"/>
-                      </a:solidFill>
-                      <a:prstDash val="solid"/>
-                      <a:round/>
-                      <a:headEnd type="none" w="med" len="med"/>
-                      <a:tailEnd type="none" w="med" len="med"/>
-                    </a:lnB>
-                    <a:noFill/>
-                  </a:tcPr>
-                </a:tc>
-                <a:tc>
-                  <a:txBody>
-                    <a:bodyPr/>
-                    <a:lstStyle/>
-                    <a:p>
-                      <a:pPr algn="ctr" latinLnBrk="1"/>
-                      <a:r>
-                        <a:rPr lang="en-US" altLang="zh-TW" sz="1200" b="0" i="0" kern="1200" dirty="0">
-                          <a:solidFill>
-                            <a:schemeClr val="tx1"/>
-                          </a:solidFill>
-                          <a:effectLst/>
-                          <a:latin typeface="+mn-lt"/>
-                          <a:ea typeface="+mn-ea"/>
-                          <a:cs typeface="+mn-cs"/>
-                        </a:rPr>
-                        <a:t>0.5</a:t>
-                      </a:r>
-                    </a:p>
-                  </a:txBody>
-                  <a:tcPr anchor="ctr">
-                    <a:lnL w="12700" cap="flat" cmpd="sng" algn="ctr">
-                      <a:solidFill>
-                        <a:schemeClr val="tx1"/>
-                      </a:solidFill>
-                      <a:prstDash val="solid"/>
-                      <a:round/>
-                      <a:headEnd type="none" w="med" len="med"/>
-                      <a:tailEnd type="none" w="med" len="med"/>
-                    </a:lnL>
-                    <a:lnR w="12700" cap="flat" cmpd="sng" algn="ctr">
-                      <a:solidFill>
-                        <a:schemeClr val="tx1"/>
-                      </a:solidFill>
-                      <a:prstDash val="solid"/>
-                      <a:round/>
-                      <a:headEnd type="none" w="med" len="med"/>
-                      <a:tailEnd type="none" w="med" len="med"/>
-                    </a:lnR>
-                    <a:lnT w="12700" cap="flat" cmpd="sng" algn="ctr">
-                      <a:solidFill>
-                        <a:schemeClr val="tx1"/>
-                      </a:solidFill>
-                      <a:prstDash val="solid"/>
-                      <a:round/>
-                      <a:headEnd type="none" w="med" len="med"/>
-                      <a:tailEnd type="none" w="med" len="med"/>
-                    </a:lnT>
-                    <a:lnB w="12700" cap="flat" cmpd="sng" algn="ctr">
-                      <a:solidFill>
-                        <a:schemeClr val="tx1"/>
-                      </a:solidFill>
-                      <a:prstDash val="solid"/>
-                      <a:round/>
-                      <a:headEnd type="none" w="med" len="med"/>
-                      <a:tailEnd type="none" w="med" len="med"/>
-                    </a:lnB>
-                    <a:noFill/>
-                  </a:tcPr>
-                </a:tc>
-                <a:tc>
-                  <a:txBody>
-                    <a:bodyPr/>
-                    <a:lstStyle/>
-                    <a:p>
-                      <a:pPr marL="0" marR="0" lvl="0" indent="0" algn="ctr" defTabSz="914400" rtl="0" eaLnBrk="1" fontAlgn="auto" latinLnBrk="1" hangingPunct="1">
-                        <a:lnSpc>
-                          <a:spcPct val="100000"/>
-                        </a:lnSpc>
-                        <a:spcBef>
-                          <a:spcPts val="0"/>
-                        </a:spcBef>
-                        <a:spcAft>
-                          <a:spcPts val="0"/>
-                        </a:spcAft>
-                        <a:buClrTx/>
-                        <a:buSzTx/>
-                        <a:buFontTx/>
-                        <a:buNone/>
-                        <a:tabLst/>
-                        <a:defRPr/>
-                      </a:pPr>
-                      <a:r>
-                        <a:rPr lang="en-US" altLang="zh-TW" sz="1200" b="0" i="0" kern="1200" dirty="0">
-                          <a:solidFill>
-                            <a:schemeClr val="tx1"/>
-                          </a:solidFill>
-                          <a:effectLst/>
-                          <a:latin typeface="+mn-lt"/>
-                          <a:ea typeface="+mn-ea"/>
-                          <a:cs typeface="+mn-cs"/>
-                        </a:rPr>
-                        <a:t>0.05</a:t>
-                      </a:r>
-                    </a:p>
-                  </a:txBody>
-                  <a:tcPr anchor="ctr">
-                    <a:lnL w="12700" cap="flat" cmpd="sng" algn="ctr">
-                      <a:solidFill>
-                        <a:schemeClr val="tx1"/>
-                      </a:solidFill>
-                      <a:prstDash val="solid"/>
-                      <a:round/>
-                      <a:headEnd type="none" w="med" len="med"/>
-                      <a:tailEnd type="none" w="med" len="med"/>
-                    </a:lnL>
-                    <a:lnR w="12700" cap="flat" cmpd="sng" algn="ctr">
-                      <a:solidFill>
-                        <a:schemeClr val="tx1"/>
-                      </a:solidFill>
-                      <a:prstDash val="solid"/>
-                      <a:round/>
-                      <a:headEnd type="none" w="med" len="med"/>
-                      <a:tailEnd type="none" w="med" len="med"/>
-                    </a:lnR>
-                    <a:lnT w="12700" cap="flat" cmpd="sng" algn="ctr">
-                      <a:solidFill>
-                        <a:schemeClr val="tx1"/>
-                      </a:solidFill>
-                      <a:prstDash val="solid"/>
-                      <a:round/>
-                      <a:headEnd type="none" w="med" len="med"/>
-                      <a:tailEnd type="none" w="med" len="med"/>
-                    </a:lnT>
-                    <a:lnB w="12700" cap="flat" cmpd="sng" algn="ctr">
-                      <a:solidFill>
-                        <a:schemeClr val="tx1"/>
-                      </a:solidFill>
-                      <a:prstDash val="solid"/>
-                      <a:round/>
-                      <a:headEnd type="none" w="med" len="med"/>
-                      <a:tailEnd type="none" w="med" len="med"/>
-                    </a:lnB>
-                    <a:noFill/>
-                  </a:tcPr>
-                </a:tc>
-                <a:extLst>
-                  <a:ext uri="{0D108BD9-81ED-4DB2-BD59-A6C34878D82A}">
-                    <a16:rowId xmlns:a16="http://schemas.microsoft.com/office/drawing/2014/main" val="3358222618"/>
-                  </a:ext>
-                </a:extLst>
-              </a:tr>
-            </a:tbl>
-          </a:graphicData>
-        </a:graphic>
-      </p:graphicFrame>
+          <p:cNvPicPr>
+            <a:picLocks noChangeAspect="1"/>
+          </p:cNvPicPr>
+          <p:nvPr/>
+        </p:nvPicPr>
+        <p:blipFill>
+          <a:blip r:embed="rId4"/>
+          <a:stretch>
+            <a:fillRect/>
+          </a:stretch>
+        </p:blipFill>
+        <p:spPr>
+          <a:xfrm>
+            <a:off x="6096000" y="1690688"/>
+            <a:ext cx="4847288" cy="4405838"/>
+          </a:xfrm>
+          <a:prstGeom prst="rect">
+            <a:avLst/>
+          </a:prstGeom>
+        </p:spPr>
+      </p:pic>
+      <p:grpSp>
+        <p:nvGrpSpPr>
+          <p:cNvPr id="12" name="群組 11">
+            <a:extLst>
+              <a:ext uri="{FF2B5EF4-FFF2-40B4-BE49-F238E27FC236}">
+                <a16:creationId xmlns:a16="http://schemas.microsoft.com/office/drawing/2014/main" id="{46DB5AA6-CEBA-9A31-347D-D74F1A1D1962}"/>
+              </a:ext>
+            </a:extLst>
+          </p:cNvPr>
+          <p:cNvGrpSpPr/>
+          <p:nvPr/>
+        </p:nvGrpSpPr>
+        <p:grpSpPr>
+          <a:xfrm>
+            <a:off x="821688" y="647641"/>
+            <a:ext cx="10548621" cy="488847"/>
+            <a:chOff x="1153294" y="1606171"/>
+            <a:chExt cx="10548621" cy="488847"/>
+          </a:xfrm>
+        </p:grpSpPr>
+        <p:sp>
+          <p:nvSpPr>
+            <p:cNvPr id="13" name="矩形 12">
+              <a:extLst>
+                <a:ext uri="{FF2B5EF4-FFF2-40B4-BE49-F238E27FC236}">
+                  <a16:creationId xmlns:a16="http://schemas.microsoft.com/office/drawing/2014/main" id="{8C895DFB-BE39-2F2C-A46B-CB435DB028CB}"/>
+                </a:ext>
+              </a:extLst>
+            </p:cNvPr>
+            <p:cNvSpPr/>
+            <p:nvPr/>
+          </p:nvSpPr>
+          <p:spPr>
+            <a:xfrm>
+              <a:off x="1153294" y="1606171"/>
+              <a:ext cx="10274204" cy="488847"/>
+            </a:xfrm>
+            <a:prstGeom prst="rect">
+              <a:avLst/>
+            </a:prstGeom>
+            <a:solidFill>
+              <a:schemeClr val="bg1">
+                <a:lumMod val="95000"/>
+              </a:schemeClr>
+            </a:solidFill>
+            <a:ln>
+              <a:noFill/>
+            </a:ln>
+          </p:spPr>
+          <p:style>
+            <a:lnRef idx="2">
+              <a:schemeClr val="accent1">
+                <a:shade val="15000"/>
+              </a:schemeClr>
+            </a:lnRef>
+            <a:fillRef idx="1">
+              <a:schemeClr val="accent1"/>
+            </a:fillRef>
+            <a:effectRef idx="0">
+              <a:schemeClr val="accent1"/>
+            </a:effectRef>
+            <a:fontRef idx="minor">
+              <a:schemeClr val="lt1"/>
+            </a:fontRef>
+          </p:style>
+          <p:txBody>
+            <a:bodyPr rtlCol="0" anchor="ctr"/>
+            <a:lstStyle/>
+            <a:p>
+              <a:pPr algn="ctr"/>
+              <a:endParaRPr kumimoji="1" lang="zh-TW" altLang="en-US"/>
+            </a:p>
+          </p:txBody>
+        </p:sp>
+        <p:sp>
+          <p:nvSpPr>
+            <p:cNvPr id="14" name="矩形 13">
+              <a:extLst>
+                <a:ext uri="{FF2B5EF4-FFF2-40B4-BE49-F238E27FC236}">
+                  <a16:creationId xmlns:a16="http://schemas.microsoft.com/office/drawing/2014/main" id="{5EC120AB-7B4A-833B-90FF-304DFAE8A174}"/>
+                </a:ext>
+              </a:extLst>
+            </p:cNvPr>
+            <p:cNvSpPr/>
+            <p:nvPr/>
+          </p:nvSpPr>
+          <p:spPr>
+            <a:xfrm>
+              <a:off x="1153296" y="1606171"/>
+              <a:ext cx="467159" cy="488847"/>
+            </a:xfrm>
+            <a:prstGeom prst="rect">
+              <a:avLst/>
+            </a:prstGeom>
+            <a:solidFill>
+              <a:schemeClr val="accent1">
+                <a:lumMod val="75000"/>
+              </a:schemeClr>
+            </a:solidFill>
+            <a:ln>
+              <a:noFill/>
+            </a:ln>
+          </p:spPr>
+          <p:style>
+            <a:lnRef idx="2">
+              <a:schemeClr val="accent1">
+                <a:shade val="15000"/>
+              </a:schemeClr>
+            </a:lnRef>
+            <a:fillRef idx="1">
+              <a:schemeClr val="accent1"/>
+            </a:fillRef>
+            <a:effectRef idx="0">
+              <a:schemeClr val="accent1"/>
+            </a:effectRef>
+            <a:fontRef idx="minor">
+              <a:schemeClr val="lt1"/>
+            </a:fontRef>
+          </p:style>
+          <p:txBody>
+            <a:bodyPr rtlCol="0" anchor="ctr"/>
+            <a:lstStyle/>
+            <a:p>
+              <a:pPr algn="ctr"/>
+              <a:endParaRPr kumimoji="1" lang="zh-TW" altLang="en-US" dirty="0"/>
+            </a:p>
+          </p:txBody>
+        </p:sp>
+        <p:sp>
+          <p:nvSpPr>
+            <p:cNvPr id="15" name="標題 1">
+              <a:extLst>
+                <a:ext uri="{FF2B5EF4-FFF2-40B4-BE49-F238E27FC236}">
+                  <a16:creationId xmlns:a16="http://schemas.microsoft.com/office/drawing/2014/main" id="{6C2C353D-995F-FF3D-A6EB-F5A094EE3329}"/>
+                </a:ext>
+              </a:extLst>
+            </p:cNvPr>
+            <p:cNvSpPr txBox="1">
+              <a:spLocks/>
+            </p:cNvSpPr>
+            <p:nvPr/>
+          </p:nvSpPr>
+          <p:spPr>
+            <a:xfrm>
+              <a:off x="1294909" y="1712549"/>
+              <a:ext cx="168165" cy="312056"/>
+            </a:xfrm>
+            <a:prstGeom prst="rect">
+              <a:avLst/>
+            </a:prstGeom>
+          </p:spPr>
+          <p:txBody>
+            <a:bodyPr vert="horz" lIns="91440" tIns="45720" rIns="91440" bIns="45720" rtlCol="0" anchor="b">
+              <a:noAutofit/>
+            </a:bodyPr>
+            <a:lstStyle>
+              <a:lvl1pPr algn="ctr" defTabSz="914400" rtl="0" eaLnBrk="1" latinLnBrk="0" hangingPunct="1">
+                <a:lnSpc>
+                  <a:spcPct val="90000"/>
+                </a:lnSpc>
+                <a:spcBef>
+                  <a:spcPct val="0"/>
+                </a:spcBef>
+                <a:buNone/>
+                <a:defRPr sz="6000" kern="1200">
+                  <a:solidFill>
+                    <a:schemeClr val="tx1"/>
+                  </a:solidFill>
+                  <a:latin typeface="+mj-lt"/>
+                  <a:ea typeface="+mj-ea"/>
+                  <a:cs typeface="+mj-cs"/>
+                </a:defRPr>
+              </a:lvl1pPr>
+            </a:lstStyle>
+            <a:p>
+              <a:r>
+                <a:rPr lang="en-US" altLang="zh-TW" sz="1800" dirty="0">
+                  <a:solidFill>
+                    <a:schemeClr val="bg1">
+                      <a:lumMod val="95000"/>
+                    </a:schemeClr>
+                  </a:solidFill>
+                  <a:latin typeface="Snell Roundhand" panose="02000603080000090004" pitchFamily="2" charset="0"/>
+                </a:rPr>
+                <a:t>2</a:t>
+              </a:r>
+              <a:endParaRPr lang="zh-TW" altLang="en-US" sz="1800" dirty="0">
+                <a:solidFill>
+                  <a:schemeClr val="bg1">
+                    <a:lumMod val="95000"/>
+                  </a:schemeClr>
+                </a:solidFill>
+                <a:latin typeface="Snell Roundhand" panose="02000603080000090004" pitchFamily="2" charset="0"/>
+              </a:endParaRPr>
+            </a:p>
+          </p:txBody>
+        </p:sp>
+        <p:sp>
+          <p:nvSpPr>
+            <p:cNvPr id="16" name="副標題 2">
+              <a:extLst>
+                <a:ext uri="{FF2B5EF4-FFF2-40B4-BE49-F238E27FC236}">
+                  <a16:creationId xmlns:a16="http://schemas.microsoft.com/office/drawing/2014/main" id="{31EF9FCB-411E-434C-75DC-0FB8889DEA0C}"/>
+                </a:ext>
+              </a:extLst>
+            </p:cNvPr>
+            <p:cNvSpPr txBox="1">
+              <a:spLocks/>
+            </p:cNvSpPr>
+            <p:nvPr/>
+          </p:nvSpPr>
+          <p:spPr>
+            <a:xfrm>
+              <a:off x="1736546" y="1642137"/>
+              <a:ext cx="9965369" cy="452881"/>
+            </a:xfrm>
+            <a:prstGeom prst="rect">
+              <a:avLst/>
+            </a:prstGeom>
+          </p:spPr>
+          <p:txBody>
+            <a:bodyPr vert="horz" lIns="91440" tIns="45720" rIns="91440" bIns="45720" rtlCol="0">
+              <a:noAutofit/>
+            </a:bodyPr>
+            <a:lstStyle>
+              <a:lvl1pPr marL="0" indent="0" algn="ctr" defTabSz="914400" rtl="0" eaLnBrk="1" latinLnBrk="0" hangingPunct="1">
+                <a:lnSpc>
+                  <a:spcPct val="90000"/>
+                </a:lnSpc>
+                <a:spcBef>
+                  <a:spcPts val="1000"/>
+                </a:spcBef>
+                <a:buFont typeface="Arial" panose="020B0604020202020204" pitchFamily="34" charset="0"/>
+                <a:buNone/>
+                <a:defRPr sz="2400" kern="1200">
+                  <a:solidFill>
+                    <a:schemeClr val="tx1"/>
+                  </a:solidFill>
+                  <a:latin typeface="+mn-lt"/>
+                  <a:ea typeface="+mn-ea"/>
+                  <a:cs typeface="+mn-cs"/>
+                </a:defRPr>
+              </a:lvl1pPr>
+              <a:lvl2pPr marL="457200" indent="0" algn="ctr" defTabSz="914400" rtl="0" eaLnBrk="1" latinLnBrk="0" hangingPunct="1">
+                <a:lnSpc>
+                  <a:spcPct val="90000"/>
+                </a:lnSpc>
+                <a:spcBef>
+                  <a:spcPts val="500"/>
+                </a:spcBef>
+                <a:buFont typeface="Arial" panose="020B0604020202020204" pitchFamily="34" charset="0"/>
+                <a:buNone/>
+                <a:defRPr sz="2000" kern="1200">
+                  <a:solidFill>
+                    <a:schemeClr val="tx1"/>
+                  </a:solidFill>
+                  <a:latin typeface="+mn-lt"/>
+                  <a:ea typeface="+mn-ea"/>
+                  <a:cs typeface="+mn-cs"/>
+                </a:defRPr>
+              </a:lvl2pPr>
+              <a:lvl3pPr marL="914400" indent="0" algn="ctr" defTabSz="914400" rtl="0" eaLnBrk="1" latinLnBrk="0" hangingPunct="1">
+                <a:lnSpc>
+                  <a:spcPct val="90000"/>
+                </a:lnSpc>
+                <a:spcBef>
+                  <a:spcPts val="500"/>
+                </a:spcBef>
+                <a:buFont typeface="Arial" panose="020B0604020202020204" pitchFamily="34" charset="0"/>
+                <a:buNone/>
+                <a:defRPr sz="1800" kern="1200">
+                  <a:solidFill>
+                    <a:schemeClr val="tx1"/>
+                  </a:solidFill>
+                  <a:latin typeface="+mn-lt"/>
+                  <a:ea typeface="+mn-ea"/>
+                  <a:cs typeface="+mn-cs"/>
+                </a:defRPr>
+              </a:lvl3pPr>
+              <a:lvl4pPr marL="1371600" indent="0" algn="ctr" defTabSz="914400" rtl="0" eaLnBrk="1" latinLnBrk="0" hangingPunct="1">
+                <a:lnSpc>
+                  <a:spcPct val="90000"/>
+                </a:lnSpc>
+                <a:spcBef>
+                  <a:spcPts val="500"/>
+                </a:spcBef>
+                <a:buFont typeface="Arial" panose="020B0604020202020204" pitchFamily="34" charset="0"/>
+                <a:buNone/>
+                <a:defRPr sz="1600" kern="1200">
+                  <a:solidFill>
+                    <a:schemeClr val="tx1"/>
+                  </a:solidFill>
+                  <a:latin typeface="+mn-lt"/>
+                  <a:ea typeface="+mn-ea"/>
+                  <a:cs typeface="+mn-cs"/>
+                </a:defRPr>
+              </a:lvl4pPr>
+              <a:lvl5pPr marL="1828800" indent="0" algn="ctr" defTabSz="914400" rtl="0" eaLnBrk="1" latinLnBrk="0" hangingPunct="1">
+                <a:lnSpc>
+                  <a:spcPct val="90000"/>
+                </a:lnSpc>
+                <a:spcBef>
+                  <a:spcPts val="500"/>
+                </a:spcBef>
+                <a:buFont typeface="Arial" panose="020B0604020202020204" pitchFamily="34" charset="0"/>
+                <a:buNone/>
+                <a:defRPr sz="1600" kern="1200">
+                  <a:solidFill>
+                    <a:schemeClr val="tx1"/>
+                  </a:solidFill>
+                  <a:latin typeface="+mn-lt"/>
+                  <a:ea typeface="+mn-ea"/>
+                  <a:cs typeface="+mn-cs"/>
+                </a:defRPr>
+              </a:lvl5pPr>
+              <a:lvl6pPr marL="2286000" indent="0" algn="ctr" defTabSz="914400" rtl="0" eaLnBrk="1" latinLnBrk="0" hangingPunct="1">
+                <a:lnSpc>
+                  <a:spcPct val="90000"/>
+                </a:lnSpc>
+                <a:spcBef>
+                  <a:spcPts val="500"/>
+                </a:spcBef>
+                <a:buFont typeface="Arial" panose="020B0604020202020204" pitchFamily="34" charset="0"/>
+                <a:buNone/>
+                <a:defRPr sz="1600" kern="1200">
+                  <a:solidFill>
+                    <a:schemeClr val="tx1"/>
+                  </a:solidFill>
+                  <a:latin typeface="+mn-lt"/>
+                  <a:ea typeface="+mn-ea"/>
+                  <a:cs typeface="+mn-cs"/>
+                </a:defRPr>
+              </a:lvl6pPr>
+              <a:lvl7pPr marL="2743200" indent="0" algn="ctr" defTabSz="914400" rtl="0" eaLnBrk="1" latinLnBrk="0" hangingPunct="1">
+                <a:lnSpc>
+                  <a:spcPct val="90000"/>
+                </a:lnSpc>
+                <a:spcBef>
+                  <a:spcPts val="500"/>
+                </a:spcBef>
+                <a:buFont typeface="Arial" panose="020B0604020202020204" pitchFamily="34" charset="0"/>
+                <a:buNone/>
+                <a:defRPr sz="1600" kern="1200">
+                  <a:solidFill>
+                    <a:schemeClr val="tx1"/>
+                  </a:solidFill>
+                  <a:latin typeface="+mn-lt"/>
+                  <a:ea typeface="+mn-ea"/>
+                  <a:cs typeface="+mn-cs"/>
+                </a:defRPr>
+              </a:lvl7pPr>
+              <a:lvl8pPr marL="3200400" indent="0" algn="ctr" defTabSz="914400" rtl="0" eaLnBrk="1" latinLnBrk="0" hangingPunct="1">
+                <a:lnSpc>
+                  <a:spcPct val="90000"/>
+                </a:lnSpc>
+                <a:spcBef>
+                  <a:spcPts val="500"/>
+                </a:spcBef>
+                <a:buFont typeface="Arial" panose="020B0604020202020204" pitchFamily="34" charset="0"/>
+                <a:buNone/>
+                <a:defRPr sz="1600" kern="1200">
+                  <a:solidFill>
+                    <a:schemeClr val="tx1"/>
+                  </a:solidFill>
+                  <a:latin typeface="+mn-lt"/>
+                  <a:ea typeface="+mn-ea"/>
+                  <a:cs typeface="+mn-cs"/>
+                </a:defRPr>
+              </a:lvl8pPr>
+              <a:lvl9pPr marL="3657600" indent="0" algn="ctr" defTabSz="914400" rtl="0" eaLnBrk="1" latinLnBrk="0" hangingPunct="1">
+                <a:lnSpc>
+                  <a:spcPct val="90000"/>
+                </a:lnSpc>
+                <a:spcBef>
+                  <a:spcPts val="500"/>
+                </a:spcBef>
+                <a:buFont typeface="Arial" panose="020B0604020202020204" pitchFamily="34" charset="0"/>
+                <a:buNone/>
+                <a:defRPr sz="1600" kern="1200">
+                  <a:solidFill>
+                    <a:schemeClr val="tx1"/>
+                  </a:solidFill>
+                  <a:latin typeface="+mn-lt"/>
+                  <a:ea typeface="+mn-ea"/>
+                  <a:cs typeface="+mn-cs"/>
+                </a:defRPr>
+              </a:lvl9pPr>
+            </a:lstStyle>
+            <a:p>
+              <a:pPr algn="l">
+                <a:lnSpc>
+                  <a:spcPct val="100000"/>
+                </a:lnSpc>
+              </a:pPr>
+              <a:r>
+                <a:rPr lang="zh-TW" altLang="zh-TW" sz="2000" dirty="0">
+                  <a:latin typeface="Cambria" panose="02040503050406030204" pitchFamily="18" charset="0"/>
+                  <a:ea typeface="Songti SC" panose="02010600040101010101" pitchFamily="2" charset="-122"/>
+                </a:rPr>
+                <a:t>Statistical Inference</a:t>
+              </a:r>
+              <a:r>
+                <a:rPr lang="en-US" altLang="zh-TW" sz="2000" dirty="0">
+                  <a:latin typeface="Cambria" panose="02040503050406030204" pitchFamily="18" charset="0"/>
+                  <a:ea typeface="Songti SC" panose="02010600040101010101" pitchFamily="2" charset="-122"/>
+                </a:rPr>
+                <a:t>: </a:t>
+              </a:r>
+              <a:r>
+                <a:rPr lang="en" altLang="zh-TW" sz="2000" dirty="0">
+                  <a:latin typeface="Cambria" panose="02040503050406030204" pitchFamily="18" charset="0"/>
+                  <a:ea typeface="Songti SC" panose="02010600040101010101" pitchFamily="2" charset="-122"/>
+                </a:rPr>
+                <a:t>Markov Chain Monte Carlo (MCMC)-Metropolis Hastings Algorithm</a:t>
+              </a:r>
+            </a:p>
+            <a:p>
+              <a:pPr algn="l">
+                <a:lnSpc>
+                  <a:spcPct val="100000"/>
+                </a:lnSpc>
+              </a:pPr>
+              <a:endParaRPr lang="en-US" altLang="zh-TW" sz="2000" dirty="0">
+                <a:latin typeface="Cambria" panose="02040503050406030204" pitchFamily="18" charset="0"/>
+                <a:ea typeface="Songti SC" panose="02010600040101010101" pitchFamily="2" charset="-122"/>
+              </a:endParaRPr>
+            </a:p>
+          </p:txBody>
+        </p:sp>
+      </p:grpSp>
+      <p:cxnSp>
+        <p:nvCxnSpPr>
+          <p:cNvPr id="18" name="直線接點 17">
+            <a:extLst>
+              <a:ext uri="{FF2B5EF4-FFF2-40B4-BE49-F238E27FC236}">
+                <a16:creationId xmlns:a16="http://schemas.microsoft.com/office/drawing/2014/main" id="{CE527870-A8BB-17E5-17CD-611CDF0ACBF4}"/>
+              </a:ext>
+            </a:extLst>
+          </p:cNvPr>
+          <p:cNvCxnSpPr>
+            <a:cxnSpLocks/>
+          </p:cNvCxnSpPr>
+          <p:nvPr/>
+        </p:nvCxnSpPr>
+        <p:spPr>
+          <a:xfrm>
+            <a:off x="2514600" y="2423160"/>
+            <a:ext cx="0" cy="2857500"/>
+          </a:xfrm>
+          <a:prstGeom prst="line">
+            <a:avLst/>
+          </a:prstGeom>
+          <a:ln>
+            <a:solidFill>
+              <a:srgbClr val="FFC000"/>
+            </a:solidFill>
+            <a:prstDash val="dash"/>
+          </a:ln>
+        </p:spPr>
+        <p:style>
+          <a:lnRef idx="2">
+            <a:schemeClr val="accent1"/>
+          </a:lnRef>
+          <a:fillRef idx="0">
+            <a:schemeClr val="accent1"/>
+          </a:fillRef>
+          <a:effectRef idx="1">
+            <a:schemeClr val="accent1"/>
+          </a:effectRef>
+          <a:fontRef idx="minor">
+            <a:schemeClr val="tx1"/>
+          </a:fontRef>
+        </p:style>
+      </p:cxnSp>
+      <p:cxnSp>
+        <p:nvCxnSpPr>
+          <p:cNvPr id="21" name="直線接點 20">
+            <a:extLst>
+              <a:ext uri="{FF2B5EF4-FFF2-40B4-BE49-F238E27FC236}">
+                <a16:creationId xmlns:a16="http://schemas.microsoft.com/office/drawing/2014/main" id="{19614B7F-0BCC-8D96-9289-A7A80FC4BF2A}"/>
+              </a:ext>
+            </a:extLst>
+          </p:cNvPr>
+          <p:cNvCxnSpPr>
+            <a:cxnSpLocks/>
+          </p:cNvCxnSpPr>
+          <p:nvPr/>
+        </p:nvCxnSpPr>
+        <p:spPr>
+          <a:xfrm>
+            <a:off x="7616952" y="2423160"/>
+            <a:ext cx="0" cy="2857500"/>
+          </a:xfrm>
+          <a:prstGeom prst="line">
+            <a:avLst/>
+          </a:prstGeom>
+          <a:ln>
+            <a:solidFill>
+              <a:srgbClr val="FFC000"/>
+            </a:solidFill>
+            <a:prstDash val="dash"/>
+          </a:ln>
+        </p:spPr>
+        <p:style>
+          <a:lnRef idx="2">
+            <a:schemeClr val="accent1"/>
+          </a:lnRef>
+          <a:fillRef idx="0">
+            <a:schemeClr val="accent1"/>
+          </a:fillRef>
+          <a:effectRef idx="1">
+            <a:schemeClr val="accent1"/>
+          </a:effectRef>
+          <a:fontRef idx="minor">
+            <a:schemeClr val="tx1"/>
+          </a:fontRef>
+        </p:style>
+      </p:cxnSp>
     </p:spTree>
     <p:extLst>
       <p:ext uri="{BB962C8B-B14F-4D97-AF65-F5344CB8AC3E}">
-        <p14:creationId xmlns:p14="http://schemas.microsoft.com/office/powerpoint/2010/main" val="2297189252"/>
+        <p14:creationId xmlns:p14="http://schemas.microsoft.com/office/powerpoint/2010/main" val="2074200409"/>
       </p:ext>
     </p:extLst>
   </p:cSld>

--- a/統計計算.pptx
+++ b/統計計算.pptx
@@ -15,9 +15,9 @@
     <p:sldId id="258" r:id="rId6"/>
     <p:sldId id="259" r:id="rId7"/>
     <p:sldId id="260" r:id="rId8"/>
-    <p:sldId id="290" r:id="rId9"/>
+    <p:sldId id="277" r:id="rId9"/>
     <p:sldId id="280" r:id="rId10"/>
-    <p:sldId id="277" r:id="rId11"/>
+    <p:sldId id="290" r:id="rId11"/>
     <p:sldId id="281" r:id="rId12"/>
     <p:sldId id="284" r:id="rId13"/>
     <p:sldId id="285" r:id="rId14"/>
@@ -215,7 +215,7 @@
           <a:p>
             <a:fld id="{84635FF2-8915-A54A-8EAD-8F85AB9A51FE}" type="datetimeFigureOut">
               <a:rPr kumimoji="1" lang="zh-TW" altLang="en-US" smtClean="0"/>
-              <a:t>2026/5/15</a:t>
+              <a:t>2026/5/18</a:t>
             </a:fld>
             <a:endParaRPr kumimoji="1" lang="zh-TW" altLang="en-US"/>
           </a:p>
@@ -686,6 +686,271 @@
   <p:cSld>
     <p:spTree>
       <p:nvGrpSpPr>
+        <p:cNvPr id="1" name="">
+          <a:extLst>
+            <a:ext uri="{FF2B5EF4-FFF2-40B4-BE49-F238E27FC236}">
+              <a16:creationId xmlns:a16="http://schemas.microsoft.com/office/drawing/2014/main" id="{F1596DB8-5640-CEE9-72C8-905A3D68D624}"/>
+            </a:ext>
+          </a:extLst>
+        </p:cNvPr>
+        <p:cNvGrpSpPr/>
+        <p:nvPr/>
+      </p:nvGrpSpPr>
+      <p:grpSpPr>
+        <a:xfrm>
+          <a:off x="0" y="0"/>
+          <a:ext cx="0" cy="0"/>
+          <a:chOff x="0" y="0"/>
+          <a:chExt cx="0" cy="0"/>
+        </a:xfrm>
+      </p:grpSpPr>
+      <p:sp>
+        <p:nvSpPr>
+          <p:cNvPr id="2" name="投影片影像版面配置區 1">
+            <a:extLst>
+              <a:ext uri="{FF2B5EF4-FFF2-40B4-BE49-F238E27FC236}">
+                <a16:creationId xmlns:a16="http://schemas.microsoft.com/office/drawing/2014/main" id="{5C1780D8-6E43-BBD1-9746-792B36587A80}"/>
+              </a:ext>
+            </a:extLst>
+          </p:cNvPr>
+          <p:cNvSpPr>
+            <a:spLocks noGrp="1" noRot="1" noChangeAspect="1"/>
+          </p:cNvSpPr>
+          <p:nvPr>
+            <p:ph type="sldImg"/>
+          </p:nvPr>
+        </p:nvSpPr>
+        <p:spPr/>
+      </p:sp>
+      <p:sp>
+        <p:nvSpPr>
+          <p:cNvPr id="3" name="備忘稿版面配置區 2">
+            <a:extLst>
+              <a:ext uri="{FF2B5EF4-FFF2-40B4-BE49-F238E27FC236}">
+                <a16:creationId xmlns:a16="http://schemas.microsoft.com/office/drawing/2014/main" id="{F7FEBDDF-AC76-39CD-C378-5E6DC8E283CC}"/>
+              </a:ext>
+            </a:extLst>
+          </p:cNvPr>
+          <p:cNvSpPr>
+            <a:spLocks noGrp="1"/>
+          </p:cNvSpPr>
+          <p:nvPr>
+            <p:ph type="body" idx="1"/>
+          </p:nvPr>
+        </p:nvSpPr>
+        <p:spPr/>
+        <p:txBody>
+          <a:bodyPr/>
+          <a:lstStyle/>
+          <a:p>
+            <a:r>
+              <a:rPr kumimoji="1" lang="en-US" altLang="zh-TW" dirty="0"/>
+              <a:t>Permutation </a:t>
+            </a:r>
+            <a:r>
+              <a:rPr kumimoji="1" lang="zh-TW" altLang="en-US" dirty="0"/>
+              <a:t>結果：換門勝率</a:t>
+            </a:r>
+            <a:r>
+              <a:rPr kumimoji="1" lang="en-US" altLang="zh-TW" dirty="0"/>
+              <a:t>66.7%</a:t>
+            </a:r>
+            <a:r>
+              <a:rPr kumimoji="1" lang="zh-TW" altLang="en-US" dirty="0"/>
+              <a:t>、不換的勝率是</a:t>
+            </a:r>
+            <a:r>
+              <a:rPr kumimoji="1" lang="en-US" altLang="zh-TW" dirty="0"/>
+              <a:t>33.4%</a:t>
+            </a:r>
+            <a:r>
+              <a:rPr kumimoji="1" lang="zh-TW" altLang="en-US" dirty="0"/>
+              <a:t> </a:t>
+            </a:r>
+            <a:endParaRPr kumimoji="1" lang="en-US" altLang="zh-TW" dirty="0"/>
+          </a:p>
+          <a:p>
+            <a:r>
+              <a:rPr kumimoji="1" lang="zh-TW" altLang="en-US" dirty="0"/>
+              <a:t>接近理論</a:t>
+            </a:r>
+            <a:r>
+              <a:rPr kumimoji="1" lang="en-US" altLang="zh-TW" dirty="0"/>
+              <a:t>:</a:t>
+            </a:r>
+            <a:r>
+              <a:rPr kumimoji="1" lang="zh-TW" altLang="en-US" dirty="0"/>
+              <a:t>換門勝率</a:t>
+            </a:r>
+            <a:r>
+              <a:rPr kumimoji="1" lang="en-US" altLang="zh-TW" dirty="0"/>
+              <a:t>2/3. </a:t>
+            </a:r>
+            <a:r>
+              <a:rPr kumimoji="1" lang="zh-TW" altLang="en-US" dirty="0"/>
+              <a:t>不換的勝率</a:t>
+            </a:r>
+            <a:r>
+              <a:rPr kumimoji="1" lang="en-US" altLang="zh-TW" dirty="0"/>
+              <a:t>1/3</a:t>
+            </a:r>
+          </a:p>
+          <a:p>
+            <a:endParaRPr kumimoji="1" lang="en-US" altLang="zh-TW" dirty="0"/>
+          </a:p>
+          <a:p>
+            <a:pPr marL="0" marR="0" lvl="0" indent="0" algn="l" defTabSz="914400" rtl="0" eaLnBrk="1" fontAlgn="auto" latinLnBrk="0" hangingPunct="1">
+              <a:lnSpc>
+                <a:spcPct val="100000"/>
+              </a:lnSpc>
+              <a:spcBef>
+                <a:spcPts val="0"/>
+              </a:spcBef>
+              <a:spcAft>
+                <a:spcPts val="0"/>
+              </a:spcAft>
+              <a:buClrTx/>
+              <a:buSzTx/>
+              <a:buFontTx/>
+              <a:buNone/>
+              <a:tabLst/>
+              <a:defRPr/>
+            </a:pPr>
+            <a:r>
+              <a:rPr kumimoji="1" lang="en-US" altLang="zh-TW" dirty="0"/>
+              <a:t>H0:</a:t>
+            </a:r>
+            <a:r>
+              <a:rPr lang="zh-TW" altLang="zh-TW" dirty="0"/>
+              <a:t>換門與不換門</a:t>
+            </a:r>
+            <a:r>
+              <a:rPr lang="zh-TW" altLang="en-US" dirty="0"/>
+              <a:t>勝率</a:t>
+            </a:r>
+            <a:r>
+              <a:rPr lang="zh-TW" altLang="zh-TW" dirty="0"/>
+              <a:t>沒有差別</a:t>
+            </a:r>
+            <a:r>
+              <a:rPr lang="zh-TW" altLang="en-US" dirty="0"/>
+              <a:t> （兩組平均數差異</a:t>
+            </a:r>
+            <a:r>
+              <a:rPr lang="en-US" altLang="zh-TW" dirty="0"/>
+              <a:t>=0</a:t>
+            </a:r>
+            <a:r>
+              <a:rPr lang="zh-TW" altLang="en-US" dirty="0"/>
+              <a:t>）</a:t>
+            </a:r>
+            <a:endParaRPr lang="en-US" altLang="zh-TW" dirty="0"/>
+          </a:p>
+          <a:p>
+            <a:pPr marL="0" marR="0" lvl="0" indent="0" algn="l" defTabSz="914400" rtl="0" eaLnBrk="1" fontAlgn="auto" latinLnBrk="0" hangingPunct="1">
+              <a:lnSpc>
+                <a:spcPct val="100000"/>
+              </a:lnSpc>
+              <a:spcBef>
+                <a:spcPts val="0"/>
+              </a:spcBef>
+              <a:spcAft>
+                <a:spcPts val="0"/>
+              </a:spcAft>
+              <a:buClrTx/>
+              <a:buSzTx/>
+              <a:buFontTx/>
+              <a:buNone/>
+              <a:tabLst/>
+              <a:defRPr/>
+            </a:pPr>
+            <a:endParaRPr lang="en-US" altLang="zh-TW" dirty="0"/>
+          </a:p>
+          <a:p>
+            <a:pPr marL="0" marR="0" lvl="0" indent="0" algn="l" defTabSz="914400" rtl="0" eaLnBrk="1" fontAlgn="auto" latinLnBrk="0" hangingPunct="1">
+              <a:lnSpc>
+                <a:spcPct val="100000"/>
+              </a:lnSpc>
+              <a:spcBef>
+                <a:spcPts val="0"/>
+              </a:spcBef>
+              <a:spcAft>
+                <a:spcPts val="0"/>
+              </a:spcAft>
+              <a:buClrTx/>
+              <a:buSzTx/>
+              <a:buFontTx/>
+              <a:buNone/>
+              <a:tabLst/>
+              <a:defRPr/>
+            </a:pPr>
+            <a:r>
+              <a:rPr lang="en-US" altLang="zh-TW" dirty="0"/>
+              <a:t>p=0:</a:t>
+            </a:r>
+            <a:r>
+              <a:rPr lang="zh-TW" altLang="zh-TW" sz="1200" b="0" i="0" u="none" strike="noStrike" kern="1200" dirty="0">
+                <a:solidFill>
+                  <a:schemeClr val="tx1"/>
+                </a:solidFill>
+                <a:effectLst/>
+                <a:latin typeface="+mn-lt"/>
+                <a:ea typeface="+mn-ea"/>
+                <a:cs typeface="+mn-cs"/>
+              </a:rPr>
+              <a:t>observed difference 幾乎不可能來自null distribution</a:t>
+            </a:r>
+            <a:endParaRPr kumimoji="1" lang="zh-TW" altLang="en-US" dirty="0"/>
+          </a:p>
+        </p:txBody>
+      </p:sp>
+      <p:sp>
+        <p:nvSpPr>
+          <p:cNvPr id="4" name="投影片編號版面配置區 3">
+            <a:extLst>
+              <a:ext uri="{FF2B5EF4-FFF2-40B4-BE49-F238E27FC236}">
+                <a16:creationId xmlns:a16="http://schemas.microsoft.com/office/drawing/2014/main" id="{1CB21206-AF45-29CE-9C4D-C962D4B838C5}"/>
+              </a:ext>
+            </a:extLst>
+          </p:cNvPr>
+          <p:cNvSpPr>
+            <a:spLocks noGrp="1"/>
+          </p:cNvSpPr>
+          <p:nvPr>
+            <p:ph type="sldNum" sz="quarter" idx="5"/>
+          </p:nvPr>
+        </p:nvSpPr>
+        <p:spPr/>
+        <p:txBody>
+          <a:bodyPr/>
+          <a:lstStyle/>
+          <a:p>
+            <a:fld id="{4AE3F3F7-B0A0-C049-8967-D842C17DA35B}" type="slidenum">
+              <a:rPr kumimoji="1" lang="zh-TW" altLang="en-US" smtClean="0"/>
+              <a:t>14</a:t>
+            </a:fld>
+            <a:endParaRPr kumimoji="1" lang="zh-TW" altLang="en-US"/>
+          </a:p>
+        </p:txBody>
+      </p:sp>
+    </p:spTree>
+    <p:extLst>
+      <p:ext uri="{BB962C8B-B14F-4D97-AF65-F5344CB8AC3E}">
+        <p14:creationId xmlns:p14="http://schemas.microsoft.com/office/powerpoint/2010/main" val="2486383689"/>
+      </p:ext>
+    </p:extLst>
+  </p:cSld>
+  <p:clrMapOvr>
+    <a:masterClrMapping/>
+  </p:clrMapOvr>
+</p:notes>
+</file>
+
+<file path=ppt/notesSlides/notesSlide11.xml><?xml version="1.0" encoding="utf-8"?>
+<p:notes xmlns:a="http://schemas.openxmlformats.org/drawingml/2006/main" xmlns:r="http://schemas.openxmlformats.org/officeDocument/2006/relationships" xmlns:p="http://schemas.openxmlformats.org/presentationml/2006/main">
+  <p:cSld>
+    <p:spTree>
+      <p:nvGrpSpPr>
         <p:cNvPr id="1" name=""/>
         <p:cNvGrpSpPr/>
         <p:nvPr/>
@@ -768,7 +1033,7 @@
 </p:notes>
 </file>
 
-<file path=ppt/notesSlides/notesSlide11.xml><?xml version="1.0" encoding="utf-8"?>
+<file path=ppt/notesSlides/notesSlide12.xml><?xml version="1.0" encoding="utf-8"?>
 <p:notes xmlns:a="http://schemas.openxmlformats.org/drawingml/2006/main" xmlns:r="http://schemas.openxmlformats.org/officeDocument/2006/relationships" xmlns:p="http://schemas.openxmlformats.org/presentationml/2006/main">
   <p:cSld>
     <p:spTree>
@@ -996,7 +1261,7 @@
 </p:notes>
 </file>
 
-<file path=ppt/notesSlides/notesSlide12.xml><?xml version="1.0" encoding="utf-8"?>
+<file path=ppt/notesSlides/notesSlide13.xml><?xml version="1.0" encoding="utf-8"?>
 <p:notes xmlns:a="http://schemas.openxmlformats.org/drawingml/2006/main" xmlns:r="http://schemas.openxmlformats.org/officeDocument/2006/relationships" xmlns:p="http://schemas.openxmlformats.org/presentationml/2006/main">
   <p:cSld>
     <p:spTree>
@@ -1687,6 +1952,94 @@
           <a:bodyPr/>
           <a:lstStyle/>
           <a:p>
+            <a:r>
+              <a:rPr kumimoji="1" lang="en-US" altLang="zh-TW" dirty="0"/>
+              <a:t>Bernoulli Var:0.0002245371</a:t>
+            </a:r>
+            <a:endParaRPr kumimoji="1" lang="zh-TW" altLang="en-US" dirty="0"/>
+          </a:p>
+        </p:txBody>
+      </p:sp>
+      <p:sp>
+        <p:nvSpPr>
+          <p:cNvPr id="4" name="投影片編號版面配置區 3"/>
+          <p:cNvSpPr>
+            <a:spLocks noGrp="1"/>
+          </p:cNvSpPr>
+          <p:nvPr>
+            <p:ph type="sldNum" sz="quarter" idx="5"/>
+          </p:nvPr>
+        </p:nvSpPr>
+        <p:spPr/>
+        <p:txBody>
+          <a:bodyPr/>
+          <a:lstStyle/>
+          <a:p>
+            <a:fld id="{4AE3F3F7-B0A0-C049-8967-D842C17DA35B}" type="slidenum">
+              <a:rPr kumimoji="1" lang="zh-TW" altLang="en-US" smtClean="0"/>
+              <a:t>10</a:t>
+            </a:fld>
+            <a:endParaRPr kumimoji="1" lang="zh-TW" altLang="en-US"/>
+          </a:p>
+        </p:txBody>
+      </p:sp>
+    </p:spTree>
+    <p:extLst>
+      <p:ext uri="{BB962C8B-B14F-4D97-AF65-F5344CB8AC3E}">
+        <p14:creationId xmlns:p14="http://schemas.microsoft.com/office/powerpoint/2010/main" val="1371378689"/>
+      </p:ext>
+    </p:extLst>
+  </p:cSld>
+  <p:clrMapOvr>
+    <a:masterClrMapping/>
+  </p:clrMapOvr>
+</p:notes>
+</file>
+
+<file path=ppt/notesSlides/notesSlide7.xml><?xml version="1.0" encoding="utf-8"?>
+<p:notes xmlns:a="http://schemas.openxmlformats.org/drawingml/2006/main" xmlns:r="http://schemas.openxmlformats.org/officeDocument/2006/relationships" xmlns:p="http://schemas.openxmlformats.org/presentationml/2006/main">
+  <p:cSld>
+    <p:spTree>
+      <p:nvGrpSpPr>
+        <p:cNvPr id="1" name=""/>
+        <p:cNvGrpSpPr/>
+        <p:nvPr/>
+      </p:nvGrpSpPr>
+      <p:grpSpPr>
+        <a:xfrm>
+          <a:off x="0" y="0"/>
+          <a:ext cx="0" cy="0"/>
+          <a:chOff x="0" y="0"/>
+          <a:chExt cx="0" cy="0"/>
+        </a:xfrm>
+      </p:grpSpPr>
+      <p:sp>
+        <p:nvSpPr>
+          <p:cNvPr id="2" name="投影片影像版面配置區 1"/>
+          <p:cNvSpPr>
+            <a:spLocks noGrp="1" noRot="1" noChangeAspect="1"/>
+          </p:cNvSpPr>
+          <p:nvPr>
+            <p:ph type="sldImg"/>
+          </p:nvPr>
+        </p:nvSpPr>
+        <p:spPr/>
+      </p:sp>
+      <p:sp>
+        <p:nvSpPr>
+          <p:cNvPr id="3" name="備忘稿版面配置區 2"/>
+          <p:cNvSpPr>
+            <a:spLocks noGrp="1"/>
+          </p:cNvSpPr>
+          <p:nvPr>
+            <p:ph type="body" idx="1"/>
+          </p:nvPr>
+        </p:nvSpPr>
+        <p:spPr/>
+        <p:txBody>
+          <a:bodyPr/>
+          <a:lstStyle/>
+          <a:p>
             <a:endParaRPr kumimoji="1" lang="zh-TW" altLang="en-US" dirty="0"/>
           </a:p>
         </p:txBody>
@@ -1727,7 +2080,7 @@
 </p:notes>
 </file>
 
-<file path=ppt/notesSlides/notesSlide7.xml><?xml version="1.0" encoding="utf-8"?>
+<file path=ppt/notesSlides/notesSlide8.xml><?xml version="1.0" encoding="utf-8"?>
 <p:notes xmlns:a="http://schemas.openxmlformats.org/drawingml/2006/main" xmlns:r="http://schemas.openxmlformats.org/officeDocument/2006/relationships" xmlns:p="http://schemas.openxmlformats.org/presentationml/2006/main">
   <p:cSld>
     <p:spTree>
@@ -1788,6 +2141,13 @@
         <p:txBody>
           <a:bodyPr/>
           <a:lstStyle/>
+          <a:p>
+            <a:r>
+              <a:rPr kumimoji="1" lang="zh-TW" altLang="en-US" dirty="0"/>
+              <a:t>換門後選到車的機率</a:t>
+            </a:r>
+            <a:endParaRPr kumimoji="1" lang="en-US" altLang="zh-TW" dirty="0"/>
+          </a:p>
           <a:p>
             <a:r>
               <a:rPr kumimoji="1" lang="zh-TW" altLang="en-US" dirty="0"/>
@@ -1858,7 +2218,7 @@
 </p:notes>
 </file>
 
-<file path=ppt/notesSlides/notesSlide8.xml><?xml version="1.0" encoding="utf-8"?>
+<file path=ppt/notesSlides/notesSlide9.xml><?xml version="1.0" encoding="utf-8"?>
 <p:notes xmlns:a="http://schemas.openxmlformats.org/drawingml/2006/main" xmlns:r="http://schemas.openxmlformats.org/officeDocument/2006/relationships" xmlns:p="http://schemas.openxmlformats.org/presentationml/2006/main">
   <p:cSld>
     <p:spTree>
@@ -1964,271 +2324,6 @@
     <p:extLst>
       <p:ext uri="{BB962C8B-B14F-4D97-AF65-F5344CB8AC3E}">
         <p14:creationId xmlns:p14="http://schemas.microsoft.com/office/powerpoint/2010/main" val="1181585391"/>
-      </p:ext>
-    </p:extLst>
-  </p:cSld>
-  <p:clrMapOvr>
-    <a:masterClrMapping/>
-  </p:clrMapOvr>
-</p:notes>
-</file>
-
-<file path=ppt/notesSlides/notesSlide9.xml><?xml version="1.0" encoding="utf-8"?>
-<p:notes xmlns:a="http://schemas.openxmlformats.org/drawingml/2006/main" xmlns:r="http://schemas.openxmlformats.org/officeDocument/2006/relationships" xmlns:p="http://schemas.openxmlformats.org/presentationml/2006/main">
-  <p:cSld>
-    <p:spTree>
-      <p:nvGrpSpPr>
-        <p:cNvPr id="1" name="">
-          <a:extLst>
-            <a:ext uri="{FF2B5EF4-FFF2-40B4-BE49-F238E27FC236}">
-              <a16:creationId xmlns:a16="http://schemas.microsoft.com/office/drawing/2014/main" id="{F1596DB8-5640-CEE9-72C8-905A3D68D624}"/>
-            </a:ext>
-          </a:extLst>
-        </p:cNvPr>
-        <p:cNvGrpSpPr/>
-        <p:nvPr/>
-      </p:nvGrpSpPr>
-      <p:grpSpPr>
-        <a:xfrm>
-          <a:off x="0" y="0"/>
-          <a:ext cx="0" cy="0"/>
-          <a:chOff x="0" y="0"/>
-          <a:chExt cx="0" cy="0"/>
-        </a:xfrm>
-      </p:grpSpPr>
-      <p:sp>
-        <p:nvSpPr>
-          <p:cNvPr id="2" name="投影片影像版面配置區 1">
-            <a:extLst>
-              <a:ext uri="{FF2B5EF4-FFF2-40B4-BE49-F238E27FC236}">
-                <a16:creationId xmlns:a16="http://schemas.microsoft.com/office/drawing/2014/main" id="{5C1780D8-6E43-BBD1-9746-792B36587A80}"/>
-              </a:ext>
-            </a:extLst>
-          </p:cNvPr>
-          <p:cNvSpPr>
-            <a:spLocks noGrp="1" noRot="1" noChangeAspect="1"/>
-          </p:cNvSpPr>
-          <p:nvPr>
-            <p:ph type="sldImg"/>
-          </p:nvPr>
-        </p:nvSpPr>
-        <p:spPr/>
-      </p:sp>
-      <p:sp>
-        <p:nvSpPr>
-          <p:cNvPr id="3" name="備忘稿版面配置區 2">
-            <a:extLst>
-              <a:ext uri="{FF2B5EF4-FFF2-40B4-BE49-F238E27FC236}">
-                <a16:creationId xmlns:a16="http://schemas.microsoft.com/office/drawing/2014/main" id="{F7FEBDDF-AC76-39CD-C378-5E6DC8E283CC}"/>
-              </a:ext>
-            </a:extLst>
-          </p:cNvPr>
-          <p:cNvSpPr>
-            <a:spLocks noGrp="1"/>
-          </p:cNvSpPr>
-          <p:nvPr>
-            <p:ph type="body" idx="1"/>
-          </p:nvPr>
-        </p:nvSpPr>
-        <p:spPr/>
-        <p:txBody>
-          <a:bodyPr/>
-          <a:lstStyle/>
-          <a:p>
-            <a:r>
-              <a:rPr kumimoji="1" lang="en-US" altLang="zh-TW" dirty="0"/>
-              <a:t>Permutation </a:t>
-            </a:r>
-            <a:r>
-              <a:rPr kumimoji="1" lang="zh-TW" altLang="en-US" dirty="0"/>
-              <a:t>結果：換門勝率</a:t>
-            </a:r>
-            <a:r>
-              <a:rPr kumimoji="1" lang="en-US" altLang="zh-TW" dirty="0"/>
-              <a:t>66.7%</a:t>
-            </a:r>
-            <a:r>
-              <a:rPr kumimoji="1" lang="zh-TW" altLang="en-US" dirty="0"/>
-              <a:t>、不換的勝率是</a:t>
-            </a:r>
-            <a:r>
-              <a:rPr kumimoji="1" lang="en-US" altLang="zh-TW" dirty="0"/>
-              <a:t>33.4%</a:t>
-            </a:r>
-            <a:r>
-              <a:rPr kumimoji="1" lang="zh-TW" altLang="en-US" dirty="0"/>
-              <a:t> </a:t>
-            </a:r>
-            <a:endParaRPr kumimoji="1" lang="en-US" altLang="zh-TW" dirty="0"/>
-          </a:p>
-          <a:p>
-            <a:r>
-              <a:rPr kumimoji="1" lang="zh-TW" altLang="en-US" dirty="0"/>
-              <a:t>接近理論</a:t>
-            </a:r>
-            <a:r>
-              <a:rPr kumimoji="1" lang="en-US" altLang="zh-TW" dirty="0"/>
-              <a:t>:</a:t>
-            </a:r>
-            <a:r>
-              <a:rPr kumimoji="1" lang="zh-TW" altLang="en-US" dirty="0"/>
-              <a:t>換門勝率</a:t>
-            </a:r>
-            <a:r>
-              <a:rPr kumimoji="1" lang="en-US" altLang="zh-TW" dirty="0"/>
-              <a:t>2/3. </a:t>
-            </a:r>
-            <a:r>
-              <a:rPr kumimoji="1" lang="zh-TW" altLang="en-US" dirty="0"/>
-              <a:t>不換的勝率</a:t>
-            </a:r>
-            <a:r>
-              <a:rPr kumimoji="1" lang="en-US" altLang="zh-TW" dirty="0"/>
-              <a:t>1/3</a:t>
-            </a:r>
-          </a:p>
-          <a:p>
-            <a:endParaRPr kumimoji="1" lang="en-US" altLang="zh-TW" dirty="0"/>
-          </a:p>
-          <a:p>
-            <a:pPr marL="0" marR="0" lvl="0" indent="0" algn="l" defTabSz="914400" rtl="0" eaLnBrk="1" fontAlgn="auto" latinLnBrk="0" hangingPunct="1">
-              <a:lnSpc>
-                <a:spcPct val="100000"/>
-              </a:lnSpc>
-              <a:spcBef>
-                <a:spcPts val="0"/>
-              </a:spcBef>
-              <a:spcAft>
-                <a:spcPts val="0"/>
-              </a:spcAft>
-              <a:buClrTx/>
-              <a:buSzTx/>
-              <a:buFontTx/>
-              <a:buNone/>
-              <a:tabLst/>
-              <a:defRPr/>
-            </a:pPr>
-            <a:r>
-              <a:rPr kumimoji="1" lang="en-US" altLang="zh-TW" dirty="0"/>
-              <a:t>H0:</a:t>
-            </a:r>
-            <a:r>
-              <a:rPr lang="zh-TW" altLang="zh-TW" dirty="0"/>
-              <a:t>換門與不換門</a:t>
-            </a:r>
-            <a:r>
-              <a:rPr lang="zh-TW" altLang="en-US" dirty="0"/>
-              <a:t>勝率</a:t>
-            </a:r>
-            <a:r>
-              <a:rPr lang="zh-TW" altLang="zh-TW" dirty="0"/>
-              <a:t>沒有差別</a:t>
-            </a:r>
-            <a:r>
-              <a:rPr lang="zh-TW" altLang="en-US" dirty="0"/>
-              <a:t> （兩組平均數差異</a:t>
-            </a:r>
-            <a:r>
-              <a:rPr lang="en-US" altLang="zh-TW" dirty="0"/>
-              <a:t>=0</a:t>
-            </a:r>
-            <a:r>
-              <a:rPr lang="zh-TW" altLang="en-US" dirty="0"/>
-              <a:t>）</a:t>
-            </a:r>
-            <a:endParaRPr lang="en-US" altLang="zh-TW" dirty="0"/>
-          </a:p>
-          <a:p>
-            <a:pPr marL="0" marR="0" lvl="0" indent="0" algn="l" defTabSz="914400" rtl="0" eaLnBrk="1" fontAlgn="auto" latinLnBrk="0" hangingPunct="1">
-              <a:lnSpc>
-                <a:spcPct val="100000"/>
-              </a:lnSpc>
-              <a:spcBef>
-                <a:spcPts val="0"/>
-              </a:spcBef>
-              <a:spcAft>
-                <a:spcPts val="0"/>
-              </a:spcAft>
-              <a:buClrTx/>
-              <a:buSzTx/>
-              <a:buFontTx/>
-              <a:buNone/>
-              <a:tabLst/>
-              <a:defRPr/>
-            </a:pPr>
-            <a:endParaRPr lang="en-US" altLang="zh-TW" dirty="0"/>
-          </a:p>
-          <a:p>
-            <a:pPr marL="0" marR="0" lvl="0" indent="0" algn="l" defTabSz="914400" rtl="0" eaLnBrk="1" fontAlgn="auto" latinLnBrk="0" hangingPunct="1">
-              <a:lnSpc>
-                <a:spcPct val="100000"/>
-              </a:lnSpc>
-              <a:spcBef>
-                <a:spcPts val="0"/>
-              </a:spcBef>
-              <a:spcAft>
-                <a:spcPts val="0"/>
-              </a:spcAft>
-              <a:buClrTx/>
-              <a:buSzTx/>
-              <a:buFontTx/>
-              <a:buNone/>
-              <a:tabLst/>
-              <a:defRPr/>
-            </a:pPr>
-            <a:r>
-              <a:rPr lang="en-US" altLang="zh-TW" dirty="0"/>
-              <a:t>p=0:</a:t>
-            </a:r>
-            <a:r>
-              <a:rPr lang="zh-TW" altLang="zh-TW" sz="1200" b="0" i="0" u="none" strike="noStrike" kern="1200">
-                <a:solidFill>
-                  <a:schemeClr val="tx1"/>
-                </a:solidFill>
-                <a:effectLst/>
-                <a:latin typeface="+mn-lt"/>
-                <a:ea typeface="+mn-ea"/>
-                <a:cs typeface="+mn-cs"/>
-              </a:rPr>
-              <a:t>observed difference 幾乎不可能來自null distribution</a:t>
-            </a:r>
-            <a:endParaRPr kumimoji="1" lang="zh-TW" altLang="en-US" dirty="0"/>
-          </a:p>
-        </p:txBody>
-      </p:sp>
-      <p:sp>
-        <p:nvSpPr>
-          <p:cNvPr id="4" name="投影片編號版面配置區 3">
-            <a:extLst>
-              <a:ext uri="{FF2B5EF4-FFF2-40B4-BE49-F238E27FC236}">
-                <a16:creationId xmlns:a16="http://schemas.microsoft.com/office/drawing/2014/main" id="{1CB21206-AF45-29CE-9C4D-C962D4B838C5}"/>
-              </a:ext>
-            </a:extLst>
-          </p:cNvPr>
-          <p:cNvSpPr>
-            <a:spLocks noGrp="1"/>
-          </p:cNvSpPr>
-          <p:nvPr>
-            <p:ph type="sldNum" sz="quarter" idx="5"/>
-          </p:nvPr>
-        </p:nvSpPr>
-        <p:spPr/>
-        <p:txBody>
-          <a:bodyPr/>
-          <a:lstStyle/>
-          <a:p>
-            <a:fld id="{4AE3F3F7-B0A0-C049-8967-D842C17DA35B}" type="slidenum">
-              <a:rPr kumimoji="1" lang="zh-TW" altLang="en-US" smtClean="0"/>
-              <a:t>14</a:t>
-            </a:fld>
-            <a:endParaRPr kumimoji="1" lang="zh-TW" altLang="en-US"/>
-          </a:p>
-        </p:txBody>
-      </p:sp>
-    </p:spTree>
-    <p:extLst>
-      <p:ext uri="{BB962C8B-B14F-4D97-AF65-F5344CB8AC3E}">
-        <p14:creationId xmlns:p14="http://schemas.microsoft.com/office/powerpoint/2010/main" val="2486383689"/>
       </p:ext>
     </p:extLst>
   </p:cSld>
@@ -2385,7 +2480,7 @@
           <a:p>
             <a:fld id="{11AEC7CD-0132-46A9-805B-E798C8C14E80}" type="datetimeFigureOut">
               <a:rPr lang="zh-TW" altLang="en-US" smtClean="0"/>
-              <a:t>2026/5/15</a:t>
+              <a:t>2026/5/18</a:t>
             </a:fld>
             <a:endParaRPr lang="zh-TW" altLang="en-US"/>
           </a:p>
@@ -2583,7 +2678,7 @@
           <a:p>
             <a:fld id="{11AEC7CD-0132-46A9-805B-E798C8C14E80}" type="datetimeFigureOut">
               <a:rPr lang="zh-TW" altLang="en-US" smtClean="0"/>
-              <a:t>2026/5/15</a:t>
+              <a:t>2026/5/18</a:t>
             </a:fld>
             <a:endParaRPr lang="zh-TW" altLang="en-US"/>
           </a:p>
@@ -2791,7 +2886,7 @@
           <a:p>
             <a:fld id="{11AEC7CD-0132-46A9-805B-E798C8C14E80}" type="datetimeFigureOut">
               <a:rPr lang="zh-TW" altLang="en-US" smtClean="0"/>
-              <a:t>2026/5/15</a:t>
+              <a:t>2026/5/18</a:t>
             </a:fld>
             <a:endParaRPr lang="zh-TW" altLang="en-US"/>
           </a:p>
@@ -2989,7 +3084,7 @@
           <a:p>
             <a:fld id="{11AEC7CD-0132-46A9-805B-E798C8C14E80}" type="datetimeFigureOut">
               <a:rPr lang="zh-TW" altLang="en-US" smtClean="0"/>
-              <a:t>2026/5/15</a:t>
+              <a:t>2026/5/18</a:t>
             </a:fld>
             <a:endParaRPr lang="zh-TW" altLang="en-US"/>
           </a:p>
@@ -3264,7 +3359,7 @@
           <a:p>
             <a:fld id="{11AEC7CD-0132-46A9-805B-E798C8C14E80}" type="datetimeFigureOut">
               <a:rPr lang="zh-TW" altLang="en-US" smtClean="0"/>
-              <a:t>2026/5/15</a:t>
+              <a:t>2026/5/18</a:t>
             </a:fld>
             <a:endParaRPr lang="zh-TW" altLang="en-US"/>
           </a:p>
@@ -3529,7 +3624,7 @@
           <a:p>
             <a:fld id="{11AEC7CD-0132-46A9-805B-E798C8C14E80}" type="datetimeFigureOut">
               <a:rPr lang="zh-TW" altLang="en-US" smtClean="0"/>
-              <a:t>2026/5/15</a:t>
+              <a:t>2026/5/18</a:t>
             </a:fld>
             <a:endParaRPr lang="zh-TW" altLang="en-US"/>
           </a:p>
@@ -3941,7 +4036,7 @@
           <a:p>
             <a:fld id="{11AEC7CD-0132-46A9-805B-E798C8C14E80}" type="datetimeFigureOut">
               <a:rPr lang="zh-TW" altLang="en-US" smtClean="0"/>
-              <a:t>2026/5/15</a:t>
+              <a:t>2026/5/18</a:t>
             </a:fld>
             <a:endParaRPr lang="zh-TW" altLang="en-US"/>
           </a:p>
@@ -4082,7 +4177,7 @@
           <a:p>
             <a:fld id="{11AEC7CD-0132-46A9-805B-E798C8C14E80}" type="datetimeFigureOut">
               <a:rPr lang="zh-TW" altLang="en-US" smtClean="0"/>
-              <a:t>2026/5/15</a:t>
+              <a:t>2026/5/18</a:t>
             </a:fld>
             <a:endParaRPr lang="zh-TW" altLang="en-US"/>
           </a:p>
@@ -4195,7 +4290,7 @@
           <a:p>
             <a:fld id="{11AEC7CD-0132-46A9-805B-E798C8C14E80}" type="datetimeFigureOut">
               <a:rPr lang="zh-TW" altLang="en-US" smtClean="0"/>
-              <a:t>2026/5/15</a:t>
+              <a:t>2026/5/18</a:t>
             </a:fld>
             <a:endParaRPr lang="zh-TW" altLang="en-US"/>
           </a:p>
@@ -4506,7 +4601,7 @@
           <a:p>
             <a:fld id="{11AEC7CD-0132-46A9-805B-E798C8C14E80}" type="datetimeFigureOut">
               <a:rPr lang="zh-TW" altLang="en-US" smtClean="0"/>
-              <a:t>2026/5/15</a:t>
+              <a:t>2026/5/18</a:t>
             </a:fld>
             <a:endParaRPr lang="zh-TW" altLang="en-US"/>
           </a:p>
@@ -4794,7 +4889,7 @@
           <a:p>
             <a:fld id="{11AEC7CD-0132-46A9-805B-E798C8C14E80}" type="datetimeFigureOut">
               <a:rPr lang="zh-TW" altLang="en-US" smtClean="0"/>
-              <a:t>2026/5/15</a:t>
+              <a:t>2026/5/18</a:t>
             </a:fld>
             <a:endParaRPr lang="zh-TW" altLang="en-US"/>
           </a:p>
@@ -5035,7 +5130,7 @@
           <a:p>
             <a:fld id="{11AEC7CD-0132-46A9-805B-E798C8C14E80}" type="datetimeFigureOut">
               <a:rPr lang="zh-TW" altLang="en-US" smtClean="0"/>
-              <a:t>2026/5/15</a:t>
+              <a:t>2026/5/18</a:t>
             </a:fld>
             <a:endParaRPr lang="zh-TW" altLang="en-US"/>
           </a:p>
@@ -5547,7 +5642,7 @@
         <p:cNvPr id="1" name="">
           <a:extLst>
             <a:ext uri="{FF2B5EF4-FFF2-40B4-BE49-F238E27FC236}">
-              <a16:creationId xmlns:a16="http://schemas.microsoft.com/office/drawing/2014/main" id="{043D830D-8361-A4E9-3A24-3C4E343E78DA}"/>
+              <a16:creationId xmlns:a16="http://schemas.microsoft.com/office/drawing/2014/main" id="{F6E655E6-53E3-12FB-8EF0-C8AFDAD0333B}"/>
             </a:ext>
           </a:extLst>
         </p:cNvPr>
@@ -5562,102 +5657,12 @@
           <a:chExt cx="0" cy="0"/>
         </a:xfrm>
       </p:grpSpPr>
-      <p:pic>
-        <p:nvPicPr>
-          <p:cNvPr id="10" name="圖片 9">
+      <p:grpSp>
+        <p:nvGrpSpPr>
+          <p:cNvPr id="3" name="群組 2">
             <a:extLst>
               <a:ext uri="{FF2B5EF4-FFF2-40B4-BE49-F238E27FC236}">
-                <a16:creationId xmlns:a16="http://schemas.microsoft.com/office/drawing/2014/main" id="{CF4C63F7-F4E0-8A9C-C418-815A7ECC9F37}"/>
-              </a:ext>
-            </a:extLst>
-          </p:cNvPr>
-          <p:cNvPicPr>
-            <a:picLocks noChangeAspect="1"/>
-          </p:cNvPicPr>
-          <p:nvPr/>
-        </p:nvPicPr>
-        <p:blipFill>
-          <a:blip r:embed="rId2"/>
-          <a:stretch>
-            <a:fillRect/>
-          </a:stretch>
-        </p:blipFill>
-        <p:spPr>
-          <a:xfrm>
-            <a:off x="118419" y="2169203"/>
-            <a:ext cx="4143755" cy="2991732"/>
-          </a:xfrm>
-          <a:prstGeom prst="rect">
-            <a:avLst/>
-          </a:prstGeom>
-        </p:spPr>
-      </p:pic>
-      <p:pic>
-        <p:nvPicPr>
-          <p:cNvPr id="11" name="圖片 10">
-            <a:extLst>
-              <a:ext uri="{FF2B5EF4-FFF2-40B4-BE49-F238E27FC236}">
-                <a16:creationId xmlns:a16="http://schemas.microsoft.com/office/drawing/2014/main" id="{46716844-0934-55A2-6161-01E9AB1D14BC}"/>
-              </a:ext>
-            </a:extLst>
-          </p:cNvPr>
-          <p:cNvPicPr>
-            <a:picLocks noChangeAspect="1"/>
-          </p:cNvPicPr>
-          <p:nvPr/>
-        </p:nvPicPr>
-        <p:blipFill>
-          <a:blip r:embed="rId3"/>
-          <a:stretch>
-            <a:fillRect/>
-          </a:stretch>
-        </p:blipFill>
-        <p:spPr>
-          <a:xfrm>
-            <a:off x="4138423" y="2169203"/>
-            <a:ext cx="4143755" cy="2991732"/>
-          </a:xfrm>
-          <a:prstGeom prst="rect">
-            <a:avLst/>
-          </a:prstGeom>
-        </p:spPr>
-      </p:pic>
-      <p:pic>
-        <p:nvPicPr>
-          <p:cNvPr id="12" name="圖片 11">
-            <a:extLst>
-              <a:ext uri="{FF2B5EF4-FFF2-40B4-BE49-F238E27FC236}">
-                <a16:creationId xmlns:a16="http://schemas.microsoft.com/office/drawing/2014/main" id="{B83BB405-05D1-C873-D74A-D135518903E4}"/>
-              </a:ext>
-            </a:extLst>
-          </p:cNvPr>
-          <p:cNvPicPr>
-            <a:picLocks noChangeAspect="1"/>
-          </p:cNvPicPr>
-          <p:nvPr/>
-        </p:nvPicPr>
-        <p:blipFill>
-          <a:blip r:embed="rId3"/>
-          <a:stretch>
-            <a:fillRect/>
-          </a:stretch>
-        </p:blipFill>
-        <p:spPr>
-          <a:xfrm>
-            <a:off x="8048245" y="2169203"/>
-            <a:ext cx="4143755" cy="2991732"/>
-          </a:xfrm>
-          <a:prstGeom prst="rect">
-            <a:avLst/>
-          </a:prstGeom>
-        </p:spPr>
-      </p:pic>
-      <p:grpSp>
-        <p:nvGrpSpPr>
-          <p:cNvPr id="2" name="群組 1">
-            <a:extLst>
-              <a:ext uri="{FF2B5EF4-FFF2-40B4-BE49-F238E27FC236}">
-                <a16:creationId xmlns:a16="http://schemas.microsoft.com/office/drawing/2014/main" id="{CA23FC56-7488-CBC3-E20B-8DA7C78D9681}"/>
+                <a16:creationId xmlns:a16="http://schemas.microsoft.com/office/drawing/2014/main" id="{BAA5A89E-9D4C-07DE-CE69-6C7ACCC8C60E}"/>
               </a:ext>
             </a:extLst>
           </p:cNvPr>
@@ -5674,10 +5679,10 @@
         </p:grpSpPr>
         <p:sp>
           <p:nvSpPr>
-            <p:cNvPr id="3" name="矩形 2">
+            <p:cNvPr id="5" name="矩形 4">
               <a:extLst>
                 <a:ext uri="{FF2B5EF4-FFF2-40B4-BE49-F238E27FC236}">
-                  <a16:creationId xmlns:a16="http://schemas.microsoft.com/office/drawing/2014/main" id="{7F0A985A-0E3E-DFFA-9AAA-3DFEF60D1081}"/>
+                  <a16:creationId xmlns:a16="http://schemas.microsoft.com/office/drawing/2014/main" id="{09AC1504-AA0B-8EDF-028B-CFE2A69A5369}"/>
                 </a:ext>
               </a:extLst>
             </p:cNvPr>
@@ -5728,10 +5733,10 @@
         </p:sp>
         <p:sp>
           <p:nvSpPr>
-            <p:cNvPr id="4" name="矩形 3">
+            <p:cNvPr id="8" name="矩形 7">
               <a:extLst>
                 <a:ext uri="{FF2B5EF4-FFF2-40B4-BE49-F238E27FC236}">
-                  <a16:creationId xmlns:a16="http://schemas.microsoft.com/office/drawing/2014/main" id="{89D84674-9716-0698-8C96-BACC14825723}"/>
+                  <a16:creationId xmlns:a16="http://schemas.microsoft.com/office/drawing/2014/main" id="{B0191B64-88B0-EA94-8E2B-40BEF654AF50}"/>
                 </a:ext>
               </a:extLst>
             </p:cNvPr>
@@ -5782,10 +5787,10 @@
         </p:sp>
         <p:sp>
           <p:nvSpPr>
-            <p:cNvPr id="5" name="標題 1">
+            <p:cNvPr id="9" name="標題 1">
               <a:extLst>
                 <a:ext uri="{FF2B5EF4-FFF2-40B4-BE49-F238E27FC236}">
-                  <a16:creationId xmlns:a16="http://schemas.microsoft.com/office/drawing/2014/main" id="{661A851D-16B5-98D2-CB2A-D244D75152FE}"/>
+                  <a16:creationId xmlns:a16="http://schemas.microsoft.com/office/drawing/2014/main" id="{FA7F3E68-055F-C231-40D7-B197DACF4DA3}"/>
                 </a:ext>
               </a:extLst>
             </p:cNvPr>
@@ -5851,10 +5856,10 @@
         </p:sp>
         <p:sp>
           <p:nvSpPr>
-            <p:cNvPr id="6" name="副標題 2">
+            <p:cNvPr id="10" name="副標題 2">
               <a:extLst>
                 <a:ext uri="{FF2B5EF4-FFF2-40B4-BE49-F238E27FC236}">
-                  <a16:creationId xmlns:a16="http://schemas.microsoft.com/office/drawing/2014/main" id="{9F159419-E981-6CFB-62ED-ACD2C7DEEBB0}"/>
+                  <a16:creationId xmlns:a16="http://schemas.microsoft.com/office/drawing/2014/main" id="{E44E6D5B-EAC1-EB8F-B8D8-27CFE94FC7C8}"/>
                 </a:ext>
               </a:extLst>
             </p:cNvPr>
@@ -6071,12 +6076,42 @@
           </p:txBody>
         </p:sp>
       </p:grpSp>
+      <p:pic>
+        <p:nvPicPr>
+          <p:cNvPr id="4" name="圖片 3">
+            <a:extLst>
+              <a:ext uri="{FF2B5EF4-FFF2-40B4-BE49-F238E27FC236}">
+                <a16:creationId xmlns:a16="http://schemas.microsoft.com/office/drawing/2014/main" id="{5D0E4C01-1489-5B53-394B-8D2B56DADADC}"/>
+              </a:ext>
+            </a:extLst>
+          </p:cNvPr>
+          <p:cNvPicPr>
+            <a:picLocks noChangeAspect="1"/>
+          </p:cNvPicPr>
+          <p:nvPr/>
+        </p:nvPicPr>
+        <p:blipFill>
+          <a:blip r:embed="rId3"/>
+          <a:stretch>
+            <a:fillRect/>
+          </a:stretch>
+        </p:blipFill>
+        <p:spPr>
+          <a:xfrm>
+            <a:off x="118420" y="2169203"/>
+            <a:ext cx="4098676" cy="2866436"/>
+          </a:xfrm>
+          <a:prstGeom prst="rect">
+            <a:avLst/>
+          </a:prstGeom>
+        </p:spPr>
+      </p:pic>
       <p:sp>
         <p:nvSpPr>
           <p:cNvPr id="7" name="文字方塊 6">
             <a:extLst>
               <a:ext uri="{FF2B5EF4-FFF2-40B4-BE49-F238E27FC236}">
-                <a16:creationId xmlns:a16="http://schemas.microsoft.com/office/drawing/2014/main" id="{A415B038-7763-7E95-C8F4-003AEFA5F9E4}"/>
+                <a16:creationId xmlns:a16="http://schemas.microsoft.com/office/drawing/2014/main" id="{BA967B25-50BC-4AA8-A8D2-C33F7F40451C}"/>
               </a:ext>
             </a:extLst>
           </p:cNvPr>
@@ -6147,10 +6182,70 @@
           </a:p>
         </p:txBody>
       </p:sp>
+      <p:pic>
+        <p:nvPicPr>
+          <p:cNvPr id="17" name="圖片 16">
+            <a:extLst>
+              <a:ext uri="{FF2B5EF4-FFF2-40B4-BE49-F238E27FC236}">
+                <a16:creationId xmlns:a16="http://schemas.microsoft.com/office/drawing/2014/main" id="{DA364BF6-CEBD-FA41-57E1-A5579BDC7C27}"/>
+              </a:ext>
+            </a:extLst>
+          </p:cNvPr>
+          <p:cNvPicPr>
+            <a:picLocks noChangeAspect="1"/>
+          </p:cNvPicPr>
+          <p:nvPr/>
+        </p:nvPicPr>
+        <p:blipFill>
+          <a:blip r:embed="rId4"/>
+          <a:stretch>
+            <a:fillRect/>
+          </a:stretch>
+        </p:blipFill>
+        <p:spPr>
+          <a:xfrm>
+            <a:off x="4143756" y="2169203"/>
+            <a:ext cx="4098676" cy="2866437"/>
+          </a:xfrm>
+          <a:prstGeom prst="rect">
+            <a:avLst/>
+          </a:prstGeom>
+        </p:spPr>
+      </p:pic>
+      <p:pic>
+        <p:nvPicPr>
+          <p:cNvPr id="18" name="圖片 17">
+            <a:extLst>
+              <a:ext uri="{FF2B5EF4-FFF2-40B4-BE49-F238E27FC236}">
+                <a16:creationId xmlns:a16="http://schemas.microsoft.com/office/drawing/2014/main" id="{4DAC1C31-09C6-99A5-4C77-4F9C0F6A3C44}"/>
+              </a:ext>
+            </a:extLst>
+          </p:cNvPr>
+          <p:cNvPicPr>
+            <a:picLocks noChangeAspect="1"/>
+          </p:cNvPicPr>
+          <p:nvPr/>
+        </p:nvPicPr>
+        <p:blipFill>
+          <a:blip r:embed="rId5"/>
+          <a:stretch>
+            <a:fillRect/>
+          </a:stretch>
+        </p:blipFill>
+        <p:spPr>
+          <a:xfrm>
+            <a:off x="8093324" y="2169203"/>
+            <a:ext cx="4098676" cy="2866437"/>
+          </a:xfrm>
+          <a:prstGeom prst="rect">
+            <a:avLst/>
+          </a:prstGeom>
+        </p:spPr>
+      </p:pic>
     </p:spTree>
     <p:extLst>
       <p:ext uri="{BB962C8B-B14F-4D97-AF65-F5344CB8AC3E}">
-        <p14:creationId xmlns:p14="http://schemas.microsoft.com/office/powerpoint/2010/main" val="2927821591"/>
+        <p14:creationId xmlns:p14="http://schemas.microsoft.com/office/powerpoint/2010/main" val="2320933098"/>
       </p:ext>
     </p:extLst>
   </p:cSld>
@@ -6723,7 +6818,7 @@
           <p:nvPr>
             <p:extLst>
               <p:ext uri="{D42A27DB-BD31-4B8C-83A1-F6EECF244321}">
-                <p14:modId xmlns:p14="http://schemas.microsoft.com/office/powerpoint/2010/main" val="3570841493"/>
+                <p14:modId xmlns:p14="http://schemas.microsoft.com/office/powerpoint/2010/main" val="291663314"/>
               </p:ext>
             </p:extLst>
           </p:nvPr>
@@ -7157,7 +7252,7 @@
                           <a:ea typeface="Songti SC" panose="02010600040101010101" pitchFamily="2" charset="-122"/>
                           <a:cs typeface="+mn-cs"/>
                         </a:rPr>
-                        <a:t>0.0000222007</a:t>
+                        <a:t>0.000220071</a:t>
                       </a:r>
                     </a:p>
                   </a:txBody>
@@ -7316,7 +7411,7 @@
                           <a:ea typeface="Songti SC" panose="02010600040101010101" pitchFamily="2" charset="-122"/>
                           <a:cs typeface="+mn-cs"/>
                         </a:rPr>
-                        <a:t>0.333316</a:t>
+                        <a:t>0.333328</a:t>
                       </a:r>
                     </a:p>
                   </a:txBody>
@@ -7392,7 +7487,7 @@
                           <a:ea typeface="Songti SC" panose="02010600040101010101" pitchFamily="2" charset="-122"/>
                           <a:cs typeface="+mn-cs"/>
                         </a:rPr>
-                        <a:t>0.0000221541</a:t>
+                        <a:t>0.0000214475</a:t>
                       </a:r>
                     </a:p>
                   </a:txBody>
@@ -7551,7 +7646,7 @@
                           <a:ea typeface="Songti SC" panose="02010600040101010101" pitchFamily="2" charset="-122"/>
                           <a:cs typeface="+mn-cs"/>
                         </a:rPr>
-                        <a:t>0.333349</a:t>
+                        <a:t>0.333403</a:t>
                       </a:r>
                     </a:p>
                   </a:txBody>
@@ -7627,7 +7722,7 @@
                           <a:ea typeface="Songti SC" panose="02010600040101010101" pitchFamily="2" charset="-122"/>
                           <a:cs typeface="+mn-cs"/>
                         </a:rPr>
-                        <a:t>0.0000195859</a:t>
+                        <a:t>0.0000196868</a:t>
                       </a:r>
                     </a:p>
                   </a:txBody>
@@ -7719,7 +7814,7 @@
                 </a:highlight>
                 <a:latin typeface="Cambria" panose="02040503050406030204" pitchFamily="18" charset="0"/>
               </a:rPr>
-              <a:t>Variance reduction = 12.99167</a:t>
+              <a:t>Variance reduction = 12.98665</a:t>
             </a:r>
             <a:r>
               <a:rPr lang="zh-TW" altLang="en-US" sz="1400" dirty="0">
@@ -11320,8 +11415,8 @@
           </a:p>
         </p:txBody>
       </p:sp>
-      <mc:AlternateContent xmlns:mc="http://schemas.openxmlformats.org/markup-compatibility/2006">
-        <mc:Choice xmlns:a14="http://schemas.microsoft.com/office/drawing/2010/main" Requires="a14">
+      <mc:AlternateContent xmlns:mc="http://schemas.openxmlformats.org/markup-compatibility/2006" xmlns:a14="http://schemas.microsoft.com/office/drawing/2010/main">
+        <mc:Choice Requires="a14">
           <p:sp>
             <p:nvSpPr>
               <p:cNvPr id="12" name="文字方塊 11">
@@ -11459,11 +11554,12 @@
                     </m:sSub>
                   </m:oMath>
                 </a14:m>
+                <a:endParaRPr/>
               </a:p>
             </p:txBody>
           </p:sp>
         </mc:Choice>
-        <mc:Fallback>
+        <mc:Fallback xmlns="">
           <p:sp>
             <p:nvSpPr>
               <p:cNvPr id="12" name="文字方塊 11">
@@ -19688,7 +19784,7 @@
         <p:cNvPr id="1" name="">
           <a:extLst>
             <a:ext uri="{FF2B5EF4-FFF2-40B4-BE49-F238E27FC236}">
-              <a16:creationId xmlns:a16="http://schemas.microsoft.com/office/drawing/2014/main" id="{F6E655E6-53E3-12FB-8EF0-C8AFDAD0333B}"/>
+              <a16:creationId xmlns:a16="http://schemas.microsoft.com/office/drawing/2014/main" id="{043D830D-8361-A4E9-3A24-3C4E343E78DA}"/>
             </a:ext>
           </a:extLst>
         </p:cNvPr>
@@ -19703,12 +19799,72 @@
           <a:chExt cx="0" cy="0"/>
         </a:xfrm>
       </p:grpSpPr>
+      <p:pic>
+        <p:nvPicPr>
+          <p:cNvPr id="10" name="圖片 9">
+            <a:extLst>
+              <a:ext uri="{FF2B5EF4-FFF2-40B4-BE49-F238E27FC236}">
+                <a16:creationId xmlns:a16="http://schemas.microsoft.com/office/drawing/2014/main" id="{CF4C63F7-F4E0-8A9C-C418-815A7ECC9F37}"/>
+              </a:ext>
+            </a:extLst>
+          </p:cNvPr>
+          <p:cNvPicPr>
+            <a:picLocks noChangeAspect="1"/>
+          </p:cNvPicPr>
+          <p:nvPr/>
+        </p:nvPicPr>
+        <p:blipFill>
+          <a:blip r:embed="rId2"/>
+          <a:stretch>
+            <a:fillRect/>
+          </a:stretch>
+        </p:blipFill>
+        <p:spPr>
+          <a:xfrm>
+            <a:off x="118419" y="2169203"/>
+            <a:ext cx="4143755" cy="2991732"/>
+          </a:xfrm>
+          <a:prstGeom prst="rect">
+            <a:avLst/>
+          </a:prstGeom>
+        </p:spPr>
+      </p:pic>
+      <p:pic>
+        <p:nvPicPr>
+          <p:cNvPr id="11" name="圖片 10">
+            <a:extLst>
+              <a:ext uri="{FF2B5EF4-FFF2-40B4-BE49-F238E27FC236}">
+                <a16:creationId xmlns:a16="http://schemas.microsoft.com/office/drawing/2014/main" id="{46716844-0934-55A2-6161-01E9AB1D14BC}"/>
+              </a:ext>
+            </a:extLst>
+          </p:cNvPr>
+          <p:cNvPicPr>
+            <a:picLocks noChangeAspect="1"/>
+          </p:cNvPicPr>
+          <p:nvPr/>
+        </p:nvPicPr>
+        <p:blipFill>
+          <a:blip r:embed="rId3"/>
+          <a:stretch>
+            <a:fillRect/>
+          </a:stretch>
+        </p:blipFill>
+        <p:spPr>
+          <a:xfrm>
+            <a:off x="4138423" y="2169203"/>
+            <a:ext cx="4143755" cy="2991732"/>
+          </a:xfrm>
+          <a:prstGeom prst="rect">
+            <a:avLst/>
+          </a:prstGeom>
+        </p:spPr>
+      </p:pic>
       <p:grpSp>
         <p:nvGrpSpPr>
-          <p:cNvPr id="3" name="群組 2">
+          <p:cNvPr id="2" name="群組 1">
             <a:extLst>
               <a:ext uri="{FF2B5EF4-FFF2-40B4-BE49-F238E27FC236}">
-                <a16:creationId xmlns:a16="http://schemas.microsoft.com/office/drawing/2014/main" id="{BAA5A89E-9D4C-07DE-CE69-6C7ACCC8C60E}"/>
+                <a16:creationId xmlns:a16="http://schemas.microsoft.com/office/drawing/2014/main" id="{CA23FC56-7488-CBC3-E20B-8DA7C78D9681}"/>
               </a:ext>
             </a:extLst>
           </p:cNvPr>
@@ -19725,10 +19881,10 @@
         </p:grpSpPr>
         <p:sp>
           <p:nvSpPr>
-            <p:cNvPr id="5" name="矩形 4">
+            <p:cNvPr id="3" name="矩形 2">
               <a:extLst>
                 <a:ext uri="{FF2B5EF4-FFF2-40B4-BE49-F238E27FC236}">
-                  <a16:creationId xmlns:a16="http://schemas.microsoft.com/office/drawing/2014/main" id="{09AC1504-AA0B-8EDF-028B-CFE2A69A5369}"/>
+                  <a16:creationId xmlns:a16="http://schemas.microsoft.com/office/drawing/2014/main" id="{7F0A985A-0E3E-DFFA-9AAA-3DFEF60D1081}"/>
                 </a:ext>
               </a:extLst>
             </p:cNvPr>
@@ -19779,10 +19935,10 @@
         </p:sp>
         <p:sp>
           <p:nvSpPr>
-            <p:cNvPr id="8" name="矩形 7">
+            <p:cNvPr id="4" name="矩形 3">
               <a:extLst>
                 <a:ext uri="{FF2B5EF4-FFF2-40B4-BE49-F238E27FC236}">
-                  <a16:creationId xmlns:a16="http://schemas.microsoft.com/office/drawing/2014/main" id="{B0191B64-88B0-EA94-8E2B-40BEF654AF50}"/>
+                  <a16:creationId xmlns:a16="http://schemas.microsoft.com/office/drawing/2014/main" id="{89D84674-9716-0698-8C96-BACC14825723}"/>
                 </a:ext>
               </a:extLst>
             </p:cNvPr>
@@ -19833,10 +19989,10 @@
         </p:sp>
         <p:sp>
           <p:nvSpPr>
-            <p:cNvPr id="9" name="標題 1">
+            <p:cNvPr id="5" name="標題 1">
               <a:extLst>
                 <a:ext uri="{FF2B5EF4-FFF2-40B4-BE49-F238E27FC236}">
-                  <a16:creationId xmlns:a16="http://schemas.microsoft.com/office/drawing/2014/main" id="{FA7F3E68-055F-C231-40D7-B197DACF4DA3}"/>
+                  <a16:creationId xmlns:a16="http://schemas.microsoft.com/office/drawing/2014/main" id="{661A851D-16B5-98D2-CB2A-D244D75152FE}"/>
                 </a:ext>
               </a:extLst>
             </p:cNvPr>
@@ -19902,10 +20058,10 @@
         </p:sp>
         <p:sp>
           <p:nvSpPr>
-            <p:cNvPr id="10" name="副標題 2">
+            <p:cNvPr id="6" name="副標題 2">
               <a:extLst>
                 <a:ext uri="{FF2B5EF4-FFF2-40B4-BE49-F238E27FC236}">
-                  <a16:creationId xmlns:a16="http://schemas.microsoft.com/office/drawing/2014/main" id="{E44E6D5B-EAC1-EB8F-B8D8-27CFE94FC7C8}"/>
+                  <a16:creationId xmlns:a16="http://schemas.microsoft.com/office/drawing/2014/main" id="{9F159419-E981-6CFB-62ED-ACD2C7DEEBB0}"/>
                 </a:ext>
               </a:extLst>
             </p:cNvPr>
@@ -20122,102 +20278,12 @@
           </p:txBody>
         </p:sp>
       </p:grpSp>
-      <p:pic>
-        <p:nvPicPr>
-          <p:cNvPr id="2" name="圖片 1">
+      <p:sp>
+        <p:nvSpPr>
+          <p:cNvPr id="8" name="文字方塊 7">
             <a:extLst>
               <a:ext uri="{FF2B5EF4-FFF2-40B4-BE49-F238E27FC236}">
-                <a16:creationId xmlns:a16="http://schemas.microsoft.com/office/drawing/2014/main" id="{3CD4AB70-FB9D-0CA5-CA07-07C55A990B46}"/>
-              </a:ext>
-            </a:extLst>
-          </p:cNvPr>
-          <p:cNvPicPr>
-            <a:picLocks noChangeAspect="1"/>
-          </p:cNvPicPr>
-          <p:nvPr/>
-        </p:nvPicPr>
-        <p:blipFill>
-          <a:blip r:embed="rId2"/>
-          <a:stretch>
-            <a:fillRect/>
-          </a:stretch>
-        </p:blipFill>
-        <p:spPr>
-          <a:xfrm>
-            <a:off x="118419" y="2169203"/>
-            <a:ext cx="4143755" cy="2991732"/>
-          </a:xfrm>
-          <a:prstGeom prst="rect">
-            <a:avLst/>
-          </a:prstGeom>
-        </p:spPr>
-      </p:pic>
-      <p:pic>
-        <p:nvPicPr>
-          <p:cNvPr id="11" name="圖片 10">
-            <a:extLst>
-              <a:ext uri="{FF2B5EF4-FFF2-40B4-BE49-F238E27FC236}">
-                <a16:creationId xmlns:a16="http://schemas.microsoft.com/office/drawing/2014/main" id="{6910B86C-762B-7648-B9C7-318FABA96232}"/>
-              </a:ext>
-            </a:extLst>
-          </p:cNvPr>
-          <p:cNvPicPr>
-            <a:picLocks noChangeAspect="1"/>
-          </p:cNvPicPr>
-          <p:nvPr/>
-        </p:nvPicPr>
-        <p:blipFill>
-          <a:blip r:embed="rId3"/>
-          <a:stretch>
-            <a:fillRect/>
-          </a:stretch>
-        </p:blipFill>
-        <p:spPr>
-          <a:xfrm>
-            <a:off x="4138423" y="2169203"/>
-            <a:ext cx="4143755" cy="2991732"/>
-          </a:xfrm>
-          <a:prstGeom prst="rect">
-            <a:avLst/>
-          </a:prstGeom>
-        </p:spPr>
-      </p:pic>
-      <p:pic>
-        <p:nvPicPr>
-          <p:cNvPr id="12" name="圖片 11">
-            <a:extLst>
-              <a:ext uri="{FF2B5EF4-FFF2-40B4-BE49-F238E27FC236}">
-                <a16:creationId xmlns:a16="http://schemas.microsoft.com/office/drawing/2014/main" id="{D24D6102-02EC-E939-FB2C-C961A429D312}"/>
-              </a:ext>
-            </a:extLst>
-          </p:cNvPr>
-          <p:cNvPicPr>
-            <a:picLocks noChangeAspect="1"/>
-          </p:cNvPicPr>
-          <p:nvPr/>
-        </p:nvPicPr>
-        <p:blipFill>
-          <a:blip r:embed="rId3"/>
-          <a:stretch>
-            <a:fillRect/>
-          </a:stretch>
-        </p:blipFill>
-        <p:spPr>
-          <a:xfrm>
-            <a:off x="8048245" y="2169203"/>
-            <a:ext cx="4143755" cy="2991732"/>
-          </a:xfrm>
-          <a:prstGeom prst="rect">
-            <a:avLst/>
-          </a:prstGeom>
-        </p:spPr>
-      </p:pic>
-      <p:sp>
-        <p:nvSpPr>
-          <p:cNvPr id="13" name="文字方塊 12">
-            <a:extLst>
-              <a:ext uri="{FF2B5EF4-FFF2-40B4-BE49-F238E27FC236}">
-                <a16:creationId xmlns:a16="http://schemas.microsoft.com/office/drawing/2014/main" id="{EFAA2E5E-3558-82E9-9407-73E1A277FDDA}"/>
+                <a16:creationId xmlns:a16="http://schemas.microsoft.com/office/drawing/2014/main" id="{9DD3758B-E498-D506-85DD-0F4187798882}"/>
               </a:ext>
             </a:extLst>
           </p:cNvPr>
@@ -20282,10 +20348,40 @@
           </a:p>
         </p:txBody>
       </p:sp>
+      <p:pic>
+        <p:nvPicPr>
+          <p:cNvPr id="9" name="圖片 8">
+            <a:extLst>
+              <a:ext uri="{FF2B5EF4-FFF2-40B4-BE49-F238E27FC236}">
+                <a16:creationId xmlns:a16="http://schemas.microsoft.com/office/drawing/2014/main" id="{AC2410DC-1EC1-7D6E-7693-A899F5B2DFA7}"/>
+              </a:ext>
+            </a:extLst>
+          </p:cNvPr>
+          <p:cNvPicPr>
+            <a:picLocks noChangeAspect="1"/>
+          </p:cNvPicPr>
+          <p:nvPr/>
+        </p:nvPicPr>
+        <p:blipFill>
+          <a:blip r:embed="rId4"/>
+          <a:stretch>
+            <a:fillRect/>
+          </a:stretch>
+        </p:blipFill>
+        <p:spPr>
+          <a:xfrm>
+            <a:off x="7686515" y="2169203"/>
+            <a:ext cx="4505485" cy="3150942"/>
+          </a:xfrm>
+          <a:prstGeom prst="rect">
+            <a:avLst/>
+          </a:prstGeom>
+        </p:spPr>
+      </p:pic>
     </p:spTree>
     <p:extLst>
       <p:ext uri="{BB962C8B-B14F-4D97-AF65-F5344CB8AC3E}">
-        <p14:creationId xmlns:p14="http://schemas.microsoft.com/office/powerpoint/2010/main" val="2320933098"/>
+        <p14:creationId xmlns:p14="http://schemas.microsoft.com/office/powerpoint/2010/main" val="2927821591"/>
       </p:ext>
     </p:extLst>
   </p:cSld>
